--- a/project/Q1_Burnout_Analysis.pptx
+++ b/project/Q1_Burnout_Analysis.pptx
@@ -5,20 +5,17 @@
     <p:sldMasterId id="2147483648" r:id="rId1"/>
   </p:sldMasterIdLst>
   <p:notesMasterIdLst>
-    <p:notesMasterId r:id="rId13"/>
+    <p:notesMasterId r:id="rId10"/>
   </p:notesMasterIdLst>
   <p:sldIdLst>
-    <p:sldId id="256" r:id="rId2"/>
-    <p:sldId id="257" r:id="rId3"/>
-    <p:sldId id="258" r:id="rId4"/>
-    <p:sldId id="259" r:id="rId5"/>
-    <p:sldId id="260" r:id="rId6"/>
-    <p:sldId id="261" r:id="rId7"/>
-    <p:sldId id="262" r:id="rId8"/>
-    <p:sldId id="263" r:id="rId9"/>
-    <p:sldId id="264" r:id="rId10"/>
-    <p:sldId id="265" r:id="rId11"/>
-    <p:sldId id="266" r:id="rId12"/>
+    <p:sldId id="257" r:id="rId2"/>
+    <p:sldId id="258" r:id="rId3"/>
+    <p:sldId id="260" r:id="rId4"/>
+    <p:sldId id="261" r:id="rId5"/>
+    <p:sldId id="262" r:id="rId6"/>
+    <p:sldId id="263" r:id="rId7"/>
+    <p:sldId id="264" r:id="rId8"/>
+    <p:sldId id="265" r:id="rId9"/>
   </p:sldIdLst>
   <p:sldSz cx="12192000" cy="6858000"/>
   <p:notesSz cx="6858000" cy="9144000"/>
@@ -216,9 +213,9 @@
             </a:lvl1pPr>
           </a:lstStyle>
           <a:p>
-            <a:fld id="{D7C5AB1B-9F38-A54C-B7BA-2F60FA6DC19D}" type="datetimeFigureOut">
+            <a:fld id="{5952F493-6E16-DA49-91F4-8F481CF3EDA4}" type="datetimeFigureOut">
               <a:rPr lang="en-US" smtClean="0"/>
-              <a:t>4/27/26</a:t>
+              <a:t>4/28/26</a:t>
             </a:fld>
             <a:endParaRPr lang="en-US"/>
           </a:p>
@@ -374,7 +371,7 @@
             </a:lvl1pPr>
           </a:lstStyle>
           <a:p>
-            <a:fld id="{F2009B7D-D436-EE40-A65A-081FFFA8F5A7}" type="slidenum">
+            <a:fld id="{8C790D5C-2534-0F44-9DE7-681A4618993F}" type="slidenum">
               <a:rPr lang="en-US" smtClean="0"/>
               <a:t>‹#›</a:t>
             </a:fld>
@@ -385,7 +382,7 @@
     </p:spTree>
     <p:extLst>
       <p:ext uri="{BB962C8B-B14F-4D97-AF65-F5344CB8AC3E}">
-        <p14:creationId xmlns:p14="http://schemas.microsoft.com/office/powerpoint/2010/main" val="104050036"/>
+        <p14:creationId xmlns:p14="http://schemas.microsoft.com/office/powerpoint/2010/main" val="1874958892"/>
       </p:ext>
     </p:extLst>
   </p:cSld>
@@ -555,77 +552,6 @@
 </p:notes>
 </file>
 
-<file path=ppt/notesSlides/notesSlide10.xml><?xml version="1.0" encoding="utf-8"?>
-<p:notes xmlns:a="http://schemas.openxmlformats.org/drawingml/2006/main" xmlns:r="http://schemas.openxmlformats.org/officeDocument/2006/relationships" xmlns:p="http://schemas.openxmlformats.org/presentationml/2006/main">
-  <p:cSld>
-    <p:spTree>
-      <p:nvGrpSpPr>
-        <p:cNvPr id="1" name=""/>
-        <p:cNvGrpSpPr/>
-        <p:nvPr/>
-      </p:nvGrpSpPr>
-      <p:grpSpPr>
-        <a:xfrm>
-          <a:off x="0" y="0"/>
-          <a:ext cx="0" cy="0"/>
-          <a:chOff x="0" y="0"/>
-          <a:chExt cx="0" cy="0"/>
-        </a:xfrm>
-      </p:grpSpPr>
-      <p:sp>
-        <p:nvSpPr>
-          <p:cNvPr id="2" name="Slide Image Placeholder 1"/>
-          <p:cNvSpPr>
-            <a:spLocks noGrp="1" noRot="1" noChangeAspect="1"/>
-          </p:cNvSpPr>
-          <p:nvPr>
-            <p:ph type="sldImg" idx="2"/>
-          </p:nvPr>
-        </p:nvSpPr>
-        <p:spPr/>
-      </p:sp>
-      <p:sp>
-        <p:nvSpPr>
-          <p:cNvPr id="3" name="Notes Placeholder 2"/>
-          <p:cNvSpPr>
-            <a:spLocks noGrp="1"/>
-          </p:cNvSpPr>
-          <p:nvPr>
-            <p:ph type="body" sz="quarter" idx="3"/>
-          </p:nvPr>
-        </p:nvSpPr>
-        <p:spPr/>
-        <p:txBody>
-          <a:bodyPr/>
-          <a:lstStyle/>
-          <a:p>
-            <a:r>
-              <a:rPr dirty="0"/>
-              <a:t>Final recommendation prioritizes recall over precision because the cost of missing a burned-out employee (potential resignation, health issues) far exceeds the cost of a false alarm (brief check-in). SVM-RBF and Logistic Regression perform nearly identically; Logistic Reg is preferred if interpretability is needed since its coefficients are directly readable.</a:t>
-            </a:r>
-          </a:p>
-        </p:txBody>
-      </p:sp>
-      <p:sp>
-        <p:nvSpPr>
-          <p:cNvPr id="4" name="Slide Number Placeholder 3"/>
-          <p:cNvSpPr>
-            <a:spLocks noGrp="1"/>
-          </p:cNvSpPr>
-          <p:nvPr>
-            <p:ph type="sldNum" sz="quarter" idx="5"/>
-          </p:nvPr>
-        </p:nvSpPr>
-        <p:spPr/>
-      </p:sp>
-    </p:spTree>
-  </p:cSld>
-  <p:clrMapOvr>
-    <a:masterClrMapping/>
-  </p:clrMapOvr>
-</p:notes>
-</file>
-
 <file path=ppt/notesSlides/notesSlide2.xml><?xml version="1.0" encoding="utf-8"?>
 <p:notes xmlns:a="http://schemas.openxmlformats.org/drawingml/2006/main" xmlns:r="http://schemas.openxmlformats.org/officeDocument/2006/relationships" xmlns:p="http://schemas.openxmlformats.org/presentationml/2006/main">
   <p:cSld>
@@ -680,8 +606,46 @@
             </a:r>
             <a:r>
               <a:rPr dirty="0"/>
-              <a:t>='balanced' is sufficient. SMOTE was not needed. We use F1 and recall on the minority class as primary evaluation metrics.</a:t>
-            </a:r>
+              <a:t>='balanced' is sufficient. Weighted metrics are dominated by the majority class. A model can score 0.84 weighted F1 while only detecting 63% of actual burnout cases. Always check per-class metrics.</a:t>
+            </a:r>
+            <a:br>
+              <a:rPr lang="en-US" dirty="0"/>
+            </a:br>
+            <a:endParaRPr lang="en-US" dirty="0"/>
+          </a:p>
+          <a:p>
+            <a:endParaRPr lang="en-US" dirty="0"/>
+          </a:p>
+          <a:p>
+            <a:r>
+              <a:rPr lang="en-US" dirty="0"/>
+              <a:t>Key insight from confusion matrices:</a:t>
+            </a:r>
+          </a:p>
+          <a:p>
+            <a:r>
+              <a:rPr lang="en-US" dirty="0"/>
+              <a:t>- SVM-RBF: Best True Positive rate (catches most burnout cases) but more False Positives</a:t>
+            </a:r>
+          </a:p>
+          <a:p>
+            <a:r>
+              <a:rPr lang="en-US" dirty="0"/>
+              <a:t>- Random Forest: Fewest False Positives but misses half of burnout cases</a:t>
+            </a:r>
+          </a:p>
+          <a:p>
+            <a:r>
+              <a:rPr lang="en-US" dirty="0"/>
+              <a:t>- Decision Tree: Worst overall with balanced errors</a:t>
+            </a:r>
+          </a:p>
+          <a:p>
+            <a:r>
+              <a:rPr lang="en-US" dirty="0"/>
+              <a:t>The trade-off between FP and FN is visible here.</a:t>
+            </a:r>
+            <a:endParaRPr dirty="0"/>
           </a:p>
         </p:txBody>
       </p:sp>
@@ -750,7 +714,26 @@
           <a:lstStyle/>
           <a:p>
             <a:r>
-              <a:t>Weighted metrics are dominated by the majority class. A model can score 0.84 weighted F1 while only detecting 63% of actual burnout cases. Always check per-class metrics for imbalanced problems.</a:t>
+              <a:rPr dirty="0"/>
+              <a:t>Recall is more important than precision for burnout detection because:</a:t>
+            </a:r>
+          </a:p>
+          <a:p>
+            <a:r>
+              <a:rPr dirty="0"/>
+              <a:t>- False Negative (missing burnout) = employee suffers without intervention</a:t>
+            </a:r>
+          </a:p>
+          <a:p>
+            <a:r>
+              <a:rPr dirty="0"/>
+              <a:t>- False Positive (flagging non-burnout) = unnecessary check-in (low cost)</a:t>
+            </a:r>
+          </a:p>
+          <a:p>
+            <a:r>
+              <a:rPr dirty="0"/>
+              <a:t>SVM-RBF and Logistic Reg are near-identical on recall (~82-85%).</a:t>
             </a:r>
           </a:p>
         </p:txBody>
@@ -820,27 +803,8 @@
           <a:lstStyle/>
           <a:p>
             <a:r>
-              <a:t>Key insight from confusion matrices:</a:t>
-            </a:r>
-          </a:p>
-          <a:p>
-            <a:r>
-              <a:t>- SVM-RBF: Best True Positive rate (catches most burnout cases) but more False Positives</a:t>
-            </a:r>
-          </a:p>
-          <a:p>
-            <a:r>
-              <a:t>- Random Forest: Fewest False Positives but misses half of burnout cases</a:t>
-            </a:r>
-          </a:p>
-          <a:p>
-            <a:r>
-              <a:t>- Decision Tree: Worst overall with balanced errors</a:t>
-            </a:r>
-          </a:p>
-          <a:p>
-            <a:r>
-              <a:t>The trade-off between FP and FN is visible here.</a:t>
+              <a:rPr dirty="0"/>
+              <a:t>AUC is threshold-independent — it tells us the model's overall ranking ability. An AUC of 0.91 means that a randomly chosen burnout employee will score higher than a randomly chosen non-burnout employee 91% of the time.</a:t>
             </a:r>
           </a:p>
         </p:txBody>
@@ -911,7 +875,7 @@
           <a:p>
             <a:r>
               <a:rPr dirty="0"/>
-              <a:t>The gap between weighted F1 and minority-class F1 is a common pitfall in imbalanced classification. Always report per-class metrics when the minority class is the class of interest.</a:t>
+              <a:t>LASSO (L1) drives coefficients to exactly zero, performing automatic feature selection. Features with non-zero coefficients have meaningful linear associations with burnout. The strongest predictor is AI task replacement percentage — employees whose tasks are being automated are most at risk.</a:t>
             </a:r>
           </a:p>
         </p:txBody>
@@ -982,26 +946,145 @@
           <a:p>
             <a:r>
               <a:rPr dirty="0"/>
-              <a:t>Recall is more important than precision for burnout detection because:</a:t>
-            </a:r>
-          </a:p>
-          <a:p>
-            <a:r>
-              <a:rPr dirty="0"/>
-              <a:t>- False Negative (missing burnout) = employee suffers without intervention</a:t>
-            </a:r>
-          </a:p>
-          <a:p>
-            <a:r>
-              <a:rPr dirty="0"/>
-              <a:t>- False Positive (flagging non-burnout) = unnecessary check-in (low cost)</a:t>
-            </a:r>
-          </a:p>
-          <a:p>
-            <a:r>
-              <a:rPr dirty="0"/>
-              <a:t>This asymmetric cost structure favors high-recall models.</a:t>
-            </a:r>
+              <a:t>The learning curve is the simplest overfitting diagnostic. A large gap between train and CV scores means the model memorizes noise. SVM-RBF's gap (~0.12) is moderate overfitting — it won't generalize as well as its training score suggests. Logistic Regression's tiny gap (~0.03) means what you see in training is what you'll get in production.</a:t>
+            </a:r>
+            <a:br>
+              <a:rPr lang="en-US" dirty="0"/>
+            </a:br>
+            <a:br>
+              <a:rPr lang="en-US" dirty="0"/>
+            </a:br>
+            <a:r>
+              <a:rPr lang="en-US" sz="1200" b="1" i="0" kern="1200" dirty="0">
+                <a:solidFill>
+                  <a:schemeClr val="tx1"/>
+                </a:solidFill>
+                <a:effectLst/>
+                <a:latin typeface="+mn-lt"/>
+                <a:ea typeface="+mn-ea"/>
+                <a:cs typeface="+mn-cs"/>
+              </a:rPr>
+              <a:t>Lines close together</a:t>
+            </a:r>
+            <a:r>
+              <a:rPr lang="en-US" sz="1200" b="0" i="0" kern="1200" dirty="0">
+                <a:solidFill>
+                  <a:schemeClr val="tx1"/>
+                </a:solidFill>
+                <a:effectLst/>
+                <a:latin typeface="+mn-lt"/>
+                <a:ea typeface="+mn-ea"/>
+                <a:cs typeface="+mn-cs"/>
+              </a:rPr>
+              <a:t> → the model generalizes well (Logistic Regression: gap = 0.027)</a:t>
+            </a:r>
+          </a:p>
+          <a:p>
+            <a:r>
+              <a:rPr lang="en-US" sz="1200" b="1" i="0" kern="1200" dirty="0">
+                <a:solidFill>
+                  <a:schemeClr val="tx1"/>
+                </a:solidFill>
+                <a:effectLst/>
+                <a:latin typeface="+mn-lt"/>
+                <a:ea typeface="+mn-ea"/>
+                <a:cs typeface="+mn-cs"/>
+              </a:rPr>
+              <a:t>Big gap between lines</a:t>
+            </a:r>
+            <a:r>
+              <a:rPr lang="en-US" sz="1200" b="0" i="0" kern="1200" dirty="0">
+                <a:solidFill>
+                  <a:schemeClr val="tx1"/>
+                </a:solidFill>
+                <a:effectLst/>
+                <a:latin typeface="+mn-lt"/>
+                <a:ea typeface="+mn-ea"/>
+                <a:cs typeface="+mn-cs"/>
+              </a:rPr>
+              <a:t> → overfitting — the model "memorized the textbook" but can't handle new questions (SVM-RBF: gap = 0.124)</a:t>
+            </a:r>
+          </a:p>
+          <a:p>
+            <a:r>
+              <a:rPr lang="en-US" sz="1200" b="1" i="0" kern="1200" dirty="0">
+                <a:solidFill>
+                  <a:schemeClr val="tx1"/>
+                </a:solidFill>
+                <a:effectLst/>
+                <a:latin typeface="+mn-lt"/>
+                <a:ea typeface="+mn-ea"/>
+                <a:cs typeface="+mn-cs"/>
+              </a:rPr>
+              <a:t>Both lines low</a:t>
+            </a:r>
+            <a:r>
+              <a:rPr lang="en-US" sz="1200" b="0" i="0" kern="1200" dirty="0">
+                <a:solidFill>
+                  <a:schemeClr val="tx1"/>
+                </a:solidFill>
+                <a:effectLst/>
+                <a:latin typeface="+mn-lt"/>
+                <a:ea typeface="+mn-ea"/>
+                <a:cs typeface="+mn-cs"/>
+              </a:rPr>
+              <a:t> → underfitting — the model hasn't learned enough from either</a:t>
+            </a:r>
+          </a:p>
+          <a:p>
+            <a:r>
+              <a:rPr lang="en-US" sz="1200" b="0" i="0" kern="1200" dirty="0">
+                <a:solidFill>
+                  <a:schemeClr val="tx1"/>
+                </a:solidFill>
+                <a:effectLst/>
+                <a:latin typeface="+mn-lt"/>
+                <a:ea typeface="+mn-ea"/>
+                <a:cs typeface="+mn-cs"/>
+              </a:rPr>
+              <a:t>In short: the learning curve answers </a:t>
+            </a:r>
+            <a:r>
+              <a:rPr lang="en-US" sz="1200" b="0" i="1" kern="1200" dirty="0">
+                <a:solidFill>
+                  <a:schemeClr val="tx1"/>
+                </a:solidFill>
+                <a:effectLst/>
+                <a:latin typeface="+mn-lt"/>
+                <a:ea typeface="+mn-ea"/>
+                <a:cs typeface="+mn-cs"/>
+              </a:rPr>
+              <a:t>"Is my model actually learning patterns, or just memorizing the training data?"</a:t>
+            </a:r>
+            <a:endParaRPr lang="en-US" sz="1200" b="0" i="0" kern="1200" dirty="0">
+              <a:solidFill>
+                <a:schemeClr val="tx1"/>
+              </a:solidFill>
+              <a:effectLst/>
+              <a:latin typeface="+mn-lt"/>
+              <a:ea typeface="+mn-ea"/>
+              <a:cs typeface="+mn-cs"/>
+            </a:endParaRPr>
+          </a:p>
+          <a:p>
+            <a:pPr marL="0" marR="0" indent="0" algn="l" defTabSz="914400" rtl="0" eaLnBrk="1" fontAlgn="auto" latinLnBrk="0" hangingPunct="1">
+              <a:lnSpc>
+                <a:spcPct val="100000"/>
+              </a:lnSpc>
+              <a:spcBef>
+                <a:spcPts val="0"/>
+              </a:spcBef>
+              <a:spcAft>
+                <a:spcPts val="0"/>
+              </a:spcAft>
+              <a:buClrTx/>
+              <a:buSzTx/>
+              <a:buFontTx/>
+              <a:buNone/>
+              <a:tabLst/>
+              <a:defRPr/>
+            </a:pPr>
+            <a:endParaRPr dirty="0"/>
           </a:p>
         </p:txBody>
       </p:sp>
@@ -1071,7 +1154,7 @@
           <a:p>
             <a:r>
               <a:rPr dirty="0"/>
-              <a:t>AUC is threshold-independent — it tells us the model's overall ranking ability. An AUC of 0.91 means that a randomly chosen burnout employee will score higher than a randomly chosen non-burnout employee 91% of the time.</a:t>
+              <a:t>These anomalies highlight common ML pitfalls: metric selection bias, overfitting without regularization, and the danger of feature leakage. Each should be addressed in a production deployment.</a:t>
             </a:r>
           </a:p>
         </p:txBody>
@@ -1142,78 +1225,7 @@
           <a:p>
             <a:r>
               <a:rPr dirty="0"/>
-              <a:t>LASSO (L1) drives coefficients to exactly zero, performing automatic feature selection. Features with non-zero coefficients have meaningful linear associations with burnout. The strongest predictor is AI task replacement percentage — employees whose tasks are being automated are most at risk.</a:t>
-            </a:r>
-          </a:p>
-        </p:txBody>
-      </p:sp>
-      <p:sp>
-        <p:nvSpPr>
-          <p:cNvPr id="4" name="Slide Number Placeholder 3"/>
-          <p:cNvSpPr>
-            <a:spLocks noGrp="1"/>
-          </p:cNvSpPr>
-          <p:nvPr>
-            <p:ph type="sldNum" sz="quarter" idx="5"/>
-          </p:nvPr>
-        </p:nvSpPr>
-        <p:spPr/>
-      </p:sp>
-    </p:spTree>
-  </p:cSld>
-  <p:clrMapOvr>
-    <a:masterClrMapping/>
-  </p:clrMapOvr>
-</p:notes>
-</file>
-
-<file path=ppt/notesSlides/notesSlide9.xml><?xml version="1.0" encoding="utf-8"?>
-<p:notes xmlns:a="http://schemas.openxmlformats.org/drawingml/2006/main" xmlns:r="http://schemas.openxmlformats.org/officeDocument/2006/relationships" xmlns:p="http://schemas.openxmlformats.org/presentationml/2006/main">
-  <p:cSld>
-    <p:spTree>
-      <p:nvGrpSpPr>
-        <p:cNvPr id="1" name=""/>
-        <p:cNvGrpSpPr/>
-        <p:nvPr/>
-      </p:nvGrpSpPr>
-      <p:grpSpPr>
-        <a:xfrm>
-          <a:off x="0" y="0"/>
-          <a:ext cx="0" cy="0"/>
-          <a:chOff x="0" y="0"/>
-          <a:chExt cx="0" cy="0"/>
-        </a:xfrm>
-      </p:grpSpPr>
-      <p:sp>
-        <p:nvSpPr>
-          <p:cNvPr id="2" name="Slide Image Placeholder 1"/>
-          <p:cNvSpPr>
-            <a:spLocks noGrp="1" noRot="1" noChangeAspect="1"/>
-          </p:cNvSpPr>
-          <p:nvPr>
-            <p:ph type="sldImg" idx="2"/>
-          </p:nvPr>
-        </p:nvSpPr>
-        <p:spPr/>
-      </p:sp>
-      <p:sp>
-        <p:nvSpPr>
-          <p:cNvPr id="3" name="Notes Placeholder 2"/>
-          <p:cNvSpPr>
-            <a:spLocks noGrp="1"/>
-          </p:cNvSpPr>
-          <p:nvPr>
-            <p:ph type="body" sz="quarter" idx="3"/>
-          </p:nvPr>
-        </p:nvSpPr>
-        <p:spPr/>
-        <p:txBody>
-          <a:bodyPr/>
-          <a:lstStyle/>
-          <a:p>
-            <a:r>
-              <a:rPr dirty="0"/>
-              <a:t>These anomalies highlight common ML pitfalls: metric selection bias, overfitting without regularization, and the danger of feature leakage. Each should be addressed in a production deployment.</a:t>
+              <a:t>Final recommendation: Logistic Regression wins on the generalization test. Both models achieve identical CV F1 (~0.82), but LR does so without overfitting (gap=0.03 vs 0.12). The 2.5% recall difference is within noise range. LR's coefficients provide direct interpretability for HR teams — they can see exactly which factors contribute to each employee's risk score.</a:t>
             </a:r>
           </a:p>
         </p:txBody>
@@ -1417,7 +1429,7 @@
           <a:p>
             <a:fld id="{5BCAD085-E8A6-8845-BD4E-CB4CCA059FC4}" type="datetimeFigureOut">
               <a:rPr lang="en-US" smtClean="0"/>
-              <a:t>4/27/26</a:t>
+              <a:t>4/28/26</a:t>
             </a:fld>
             <a:endParaRPr lang="en-US"/>
           </a:p>
@@ -1585,7 +1597,7 @@
           <a:p>
             <a:fld id="{5BCAD085-E8A6-8845-BD4E-CB4CCA059FC4}" type="datetimeFigureOut">
               <a:rPr lang="en-US" smtClean="0"/>
-              <a:t>4/27/26</a:t>
+              <a:t>4/28/26</a:t>
             </a:fld>
             <a:endParaRPr lang="en-US"/>
           </a:p>
@@ -1763,7 +1775,7 @@
           <a:p>
             <a:fld id="{5BCAD085-E8A6-8845-BD4E-CB4CCA059FC4}" type="datetimeFigureOut">
               <a:rPr lang="en-US" smtClean="0"/>
-              <a:t>4/27/26</a:t>
+              <a:t>4/28/26</a:t>
             </a:fld>
             <a:endParaRPr lang="en-US"/>
           </a:p>
@@ -1931,7 +1943,7 @@
           <a:p>
             <a:fld id="{5BCAD085-E8A6-8845-BD4E-CB4CCA059FC4}" type="datetimeFigureOut">
               <a:rPr lang="en-US" smtClean="0"/>
-              <a:t>4/27/26</a:t>
+              <a:t>4/28/26</a:t>
             </a:fld>
             <a:endParaRPr lang="en-US"/>
           </a:p>
@@ -2176,7 +2188,7 @@
           <a:p>
             <a:fld id="{5BCAD085-E8A6-8845-BD4E-CB4CCA059FC4}" type="datetimeFigureOut">
               <a:rPr lang="en-US" smtClean="0"/>
-              <a:t>4/27/26</a:t>
+              <a:t>4/28/26</a:t>
             </a:fld>
             <a:endParaRPr lang="en-US"/>
           </a:p>
@@ -2461,7 +2473,7 @@
           <a:p>
             <a:fld id="{5BCAD085-E8A6-8845-BD4E-CB4CCA059FC4}" type="datetimeFigureOut">
               <a:rPr lang="en-US" smtClean="0"/>
-              <a:t>4/27/26</a:t>
+              <a:t>4/28/26</a:t>
             </a:fld>
             <a:endParaRPr lang="en-US"/>
           </a:p>
@@ -2880,7 +2892,7 @@
           <a:p>
             <a:fld id="{5BCAD085-E8A6-8845-BD4E-CB4CCA059FC4}" type="datetimeFigureOut">
               <a:rPr lang="en-US" smtClean="0"/>
-              <a:t>4/27/26</a:t>
+              <a:t>4/28/26</a:t>
             </a:fld>
             <a:endParaRPr lang="en-US"/>
           </a:p>
@@ -2997,7 +3009,7 @@
           <a:p>
             <a:fld id="{5BCAD085-E8A6-8845-BD4E-CB4CCA059FC4}" type="datetimeFigureOut">
               <a:rPr lang="en-US" smtClean="0"/>
-              <a:t>4/27/26</a:t>
+              <a:t>4/28/26</a:t>
             </a:fld>
             <a:endParaRPr lang="en-US"/>
           </a:p>
@@ -3092,7 +3104,7 @@
           <a:p>
             <a:fld id="{5BCAD085-E8A6-8845-BD4E-CB4CCA059FC4}" type="datetimeFigureOut">
               <a:rPr lang="en-US" smtClean="0"/>
-              <a:t>4/27/26</a:t>
+              <a:t>4/28/26</a:t>
             </a:fld>
             <a:endParaRPr lang="en-US"/>
           </a:p>
@@ -3367,7 +3379,7 @@
           <a:p>
             <a:fld id="{5BCAD085-E8A6-8845-BD4E-CB4CCA059FC4}" type="datetimeFigureOut">
               <a:rPr lang="en-US" smtClean="0"/>
-              <a:t>4/27/26</a:t>
+              <a:t>4/28/26</a:t>
             </a:fld>
             <a:endParaRPr lang="en-US"/>
           </a:p>
@@ -3619,7 +3631,7 @@
           <a:p>
             <a:fld id="{5BCAD085-E8A6-8845-BD4E-CB4CCA059FC4}" type="datetimeFigureOut">
               <a:rPr lang="en-US" smtClean="0"/>
-              <a:t>4/27/26</a:t>
+              <a:t>4/28/26</a:t>
             </a:fld>
             <a:endParaRPr lang="en-US"/>
           </a:p>
@@ -3830,7 +3842,7 @@
           <a:p>
             <a:fld id="{5BCAD085-E8A6-8845-BD4E-CB4CCA059FC4}" type="datetimeFigureOut">
               <a:rPr lang="en-US" smtClean="0"/>
-              <a:t>4/27/26</a:t>
+              <a:t>4/28/26</a:t>
             </a:fld>
             <a:endParaRPr lang="en-US"/>
           </a:p>
@@ -4213,82 +4225,6 @@
         </p:nvSpPr>
         <p:spPr>
           <a:xfrm>
-            <a:off x="914400" y="2286000"/>
-            <a:ext cx="10058400" cy="1371600"/>
-          </a:xfrm>
-          <a:prstGeom prst="rect">
-            <a:avLst/>
-          </a:prstGeom>
-          <a:noFill/>
-        </p:spPr>
-        <p:txBody>
-          <a:bodyPr wrap="none">
-            <a:spAutoFit/>
-          </a:bodyPr>
-          <a:lstStyle/>
-          <a:p>
-            <a:pPr algn="ctr">
-              <a:defRPr sz="3600" b="1">
-                <a:solidFill>
-                  <a:srgbClr val="1B2A4A"/>
-                </a:solidFill>
-              </a:defRPr>
-            </a:pPr>
-            <a:r>
-              <a:t>Q1: Who Is at Risk of Burnout?</a:t>
-            </a:r>
-          </a:p>
-          <a:p>
-            <a:pPr algn="ctr">
-              <a:defRPr sz="1800">
-                <a:solidFill>
-                  <a:srgbClr val="2E86AB"/>
-                </a:solidFill>
-              </a:defRPr>
-            </a:pPr>
-            <a:r>
-              <a:t>Binary Classification Analysis</a:t>
-            </a:r>
-            <a:br/>
-            <a:r>
-              <a:t>AI Worker Burnout &amp; Attrition Dataset (2026)</a:t>
-            </a:r>
-          </a:p>
-        </p:txBody>
-      </p:sp>
-    </p:spTree>
-  </p:cSld>
-  <p:clrMapOvr>
-    <a:masterClrMapping/>
-  </p:clrMapOvr>
-</p:sld>
-</file>
-
-<file path=ppt/slides/slide10.xml><?xml version="1.0" encoding="utf-8"?>
-<p:sld xmlns:a="http://schemas.openxmlformats.org/drawingml/2006/main" xmlns:r="http://schemas.openxmlformats.org/officeDocument/2006/relationships" xmlns:p="http://schemas.openxmlformats.org/presentationml/2006/main">
-  <p:cSld>
-    <p:spTree>
-      <p:nvGrpSpPr>
-        <p:cNvPr id="1" name=""/>
-        <p:cNvGrpSpPr/>
-        <p:nvPr/>
-      </p:nvGrpSpPr>
-      <p:grpSpPr>
-        <a:xfrm>
-          <a:off x="0" y="0"/>
-          <a:ext cx="0" cy="0"/>
-          <a:chOff x="0" y="0"/>
-          <a:chExt cx="0" cy="0"/>
-        </a:xfrm>
-      </p:grpSpPr>
-      <p:sp>
-        <p:nvSpPr>
-          <p:cNvPr id="2" name="TextBox 1"/>
-          <p:cNvSpPr txBox="1"/>
-          <p:nvPr/>
-        </p:nvSpPr>
-        <p:spPr>
-          <a:xfrm>
             <a:off x="457200" y="274320"/>
             <a:ext cx="10972800" cy="731520"/>
           </a:xfrm>
@@ -4311,354 +4247,7 @@
               </a:defRPr>
             </a:pPr>
             <a:r>
-              <a:t>Anomalies &amp; Pitfalls Identified</a:t>
-            </a:r>
-          </a:p>
-        </p:txBody>
-      </p:sp>
-      <p:sp>
-        <p:nvSpPr>
-          <p:cNvPr id="3" name="TextBox 2"/>
-          <p:cNvSpPr txBox="1"/>
-          <p:nvPr/>
-        </p:nvSpPr>
-        <p:spPr>
-          <a:xfrm>
-            <a:off x="457200" y="1005840"/>
-            <a:ext cx="10972800" cy="5350183"/>
-          </a:xfrm>
-          <a:prstGeom prst="rect">
-            <a:avLst/>
-          </a:prstGeom>
-          <a:noFill/>
-        </p:spPr>
-        <p:txBody>
-          <a:bodyPr wrap="square">
-            <a:spAutoFit/>
-          </a:bodyPr>
-          <a:lstStyle/>
-          <a:p>
-            <a:pPr>
-              <a:spcAft>
-                <a:spcPts val="1000"/>
-              </a:spcAft>
-              <a:defRPr sz="1500">
-                <a:solidFill>
-                  <a:srgbClr val="333333"/>
-                </a:solidFill>
-              </a:defRPr>
-            </a:pPr>
-            <a:r>
-              <a:rPr dirty="0"/>
-              <a:t>1. WEIGHTED METRIC DECEPTION</a:t>
-            </a:r>
-          </a:p>
-          <a:p>
-            <a:pPr>
-              <a:spcAft>
-                <a:spcPts val="1000"/>
-              </a:spcAft>
-              <a:defRPr sz="1500">
-                <a:solidFill>
-                  <a:srgbClr val="333333"/>
-                </a:solidFill>
-              </a:defRPr>
-            </a:pPr>
-            <a:r>
-              <a:rPr dirty="0"/>
-              <a:t>   Gradient Boost appeared #1 (Weighted F1=0.846) but misses 37%</a:t>
-            </a:r>
-          </a:p>
-          <a:p>
-            <a:pPr>
-              <a:spcAft>
-                <a:spcPts val="1000"/>
-              </a:spcAft>
-              <a:defRPr sz="1500">
-                <a:solidFill>
-                  <a:srgbClr val="333333"/>
-                </a:solidFill>
-              </a:defRPr>
-            </a:pPr>
-            <a:r>
-              <a:rPr dirty="0"/>
-              <a:t>   of burnout cases. The 74% majority class inflates aggregate scores.</a:t>
-            </a:r>
-          </a:p>
-          <a:p>
-            <a:pPr>
-              <a:spcAft>
-                <a:spcPts val="1000"/>
-              </a:spcAft>
-              <a:defRPr sz="1500">
-                <a:solidFill>
-                  <a:srgbClr val="333333"/>
-                </a:solidFill>
-              </a:defRPr>
-            </a:pPr>
-            <a:r>
-              <a:rPr dirty="0"/>
-              <a:t>2. PRECISION-RECALL TRADE-OFF</a:t>
-            </a:r>
-          </a:p>
-          <a:p>
-            <a:pPr>
-              <a:spcAft>
-                <a:spcPts val="1000"/>
-              </a:spcAft>
-              <a:defRPr sz="1500">
-                <a:solidFill>
-                  <a:srgbClr val="333333"/>
-                </a:solidFill>
-              </a:defRPr>
-            </a:pPr>
-            <a:r>
-              <a:rPr dirty="0"/>
-              <a:t>   Random Forest: 83% precision but only 50% recall.</a:t>
-            </a:r>
-          </a:p>
-          <a:p>
-            <a:pPr>
-              <a:spcAft>
-                <a:spcPts val="1000"/>
-              </a:spcAft>
-              <a:defRPr sz="1500">
-                <a:solidFill>
-                  <a:srgbClr val="333333"/>
-                </a:solidFill>
-              </a:defRPr>
-            </a:pPr>
-            <a:r>
-              <a:rPr dirty="0"/>
-              <a:t>   It's very sure when it flags </a:t>
-            </a:r>
-            <a:r>
-              <a:rPr lang="en-US" dirty="0"/>
-              <a:t>someone but</a:t>
-            </a:r>
-            <a:r>
-              <a:rPr dirty="0"/>
-              <a:t> misses half the cases.</a:t>
-            </a:r>
-          </a:p>
-          <a:p>
-            <a:pPr>
-              <a:spcAft>
-                <a:spcPts val="1000"/>
-              </a:spcAft>
-              <a:defRPr sz="1500">
-                <a:solidFill>
-                  <a:srgbClr val="333333"/>
-                </a:solidFill>
-              </a:defRPr>
-            </a:pPr>
-            <a:r>
-              <a:rPr dirty="0"/>
-              <a:t>3. DECISION TREE OVERFITTING</a:t>
-            </a:r>
-          </a:p>
-          <a:p>
-            <a:pPr>
-              <a:spcAft>
-                <a:spcPts val="1000"/>
-              </a:spcAft>
-              <a:defRPr sz="1500">
-                <a:solidFill>
-                  <a:srgbClr val="333333"/>
-                </a:solidFill>
-              </a:defRPr>
-            </a:pPr>
-            <a:r>
-              <a:rPr dirty="0"/>
-              <a:t>   AUC=0.678 — dramatically worse than all other models (&gt;0.9).</a:t>
-            </a:r>
-          </a:p>
-          <a:p>
-            <a:pPr>
-              <a:spcAft>
-                <a:spcPts val="1000"/>
-              </a:spcAft>
-              <a:defRPr sz="1500">
-                <a:solidFill>
-                  <a:srgbClr val="333333"/>
-                </a:solidFill>
-              </a:defRPr>
-            </a:pPr>
-            <a:r>
-              <a:rPr dirty="0"/>
-              <a:t>4. FEATURE LEAKAGE RISK</a:t>
-            </a:r>
-          </a:p>
-          <a:p>
-            <a:pPr>
-              <a:spcAft>
-                <a:spcPts val="1000"/>
-              </a:spcAft>
-              <a:defRPr sz="1500">
-                <a:solidFill>
-                  <a:srgbClr val="333333"/>
-                </a:solidFill>
-              </a:defRPr>
-            </a:pPr>
-            <a:r>
-              <a:rPr dirty="0"/>
-              <a:t>   </a:t>
-            </a:r>
-            <a:r>
-              <a:rPr dirty="0" err="1"/>
-              <a:t>burnout_score</a:t>
-            </a:r>
-            <a:r>
-              <a:rPr dirty="0"/>
-              <a:t> must be excluded from features (it IS the target).</a:t>
-            </a:r>
-          </a:p>
-          <a:p>
-            <a:pPr>
-              <a:spcAft>
-                <a:spcPts val="1000"/>
-              </a:spcAft>
-              <a:defRPr sz="1500">
-                <a:solidFill>
-                  <a:srgbClr val="333333"/>
-                </a:solidFill>
-              </a:defRPr>
-            </a:pPr>
-            <a:r>
-              <a:rPr dirty="0"/>
-              <a:t>   </a:t>
-            </a:r>
-            <a:r>
-              <a:rPr dirty="0" err="1"/>
-              <a:t>attrition_risk</a:t>
-            </a:r>
-            <a:r>
-              <a:rPr dirty="0"/>
-              <a:t> has strong correlation — borderline leakage but</a:t>
-            </a:r>
-          </a:p>
-          <a:p>
-            <a:pPr>
-              <a:spcAft>
-                <a:spcPts val="1000"/>
-              </a:spcAft>
-              <a:defRPr sz="1500">
-                <a:solidFill>
-                  <a:srgbClr val="333333"/>
-                </a:solidFill>
-              </a:defRPr>
-            </a:pPr>
-            <a:r>
-              <a:rPr dirty="0"/>
-              <a:t>   kept because it's independently measured in the dataset.</a:t>
-            </a:r>
-          </a:p>
-          <a:p>
-            <a:pPr>
-              <a:spcAft>
-                <a:spcPts val="1000"/>
-              </a:spcAft>
-              <a:defRPr sz="1500">
-                <a:solidFill>
-                  <a:srgbClr val="333333"/>
-                </a:solidFill>
-              </a:defRPr>
-            </a:pPr>
-            <a:r>
-              <a:rPr dirty="0"/>
-              <a:t>5. THRESHOLD SENSITIVITY</a:t>
-            </a:r>
-          </a:p>
-          <a:p>
-            <a:pPr>
-              <a:spcAft>
-                <a:spcPts val="1000"/>
-              </a:spcAft>
-              <a:defRPr sz="1500">
-                <a:solidFill>
-                  <a:srgbClr val="333333"/>
-                </a:solidFill>
-              </a:defRPr>
-            </a:pPr>
-            <a:r>
-              <a:rPr dirty="0"/>
-              <a:t>   75th percentile threshold is arbitrary. Shifting it changes class</a:t>
-            </a:r>
-          </a:p>
-          <a:p>
-            <a:pPr>
-              <a:spcAft>
-                <a:spcPts val="1000"/>
-              </a:spcAft>
-              <a:defRPr sz="1500">
-                <a:solidFill>
-                  <a:srgbClr val="333333"/>
-                </a:solidFill>
-              </a:defRPr>
-            </a:pPr>
-            <a:r>
-              <a:rPr dirty="0"/>
-              <a:t>   balance and model rankings. Sensitivity analysis recommended.</a:t>
-            </a:r>
-          </a:p>
-        </p:txBody>
-      </p:sp>
-    </p:spTree>
-  </p:cSld>
-  <p:clrMapOvr>
-    <a:masterClrMapping/>
-  </p:clrMapOvr>
-</p:sld>
-</file>
-
-<file path=ppt/slides/slide11.xml><?xml version="1.0" encoding="utf-8"?>
-<p:sld xmlns:a="http://schemas.openxmlformats.org/drawingml/2006/main" xmlns:r="http://schemas.openxmlformats.org/officeDocument/2006/relationships" xmlns:p="http://schemas.openxmlformats.org/presentationml/2006/main">
-  <p:cSld>
-    <p:spTree>
-      <p:nvGrpSpPr>
-        <p:cNvPr id="1" name=""/>
-        <p:cNvGrpSpPr/>
-        <p:nvPr/>
-      </p:nvGrpSpPr>
-      <p:grpSpPr>
-        <a:xfrm>
-          <a:off x="0" y="0"/>
-          <a:ext cx="0" cy="0"/>
-          <a:chOff x="0" y="0"/>
-          <a:chExt cx="0" cy="0"/>
-        </a:xfrm>
-      </p:grpSpPr>
-      <p:sp>
-        <p:nvSpPr>
-          <p:cNvPr id="2" name="TextBox 1"/>
-          <p:cNvSpPr txBox="1"/>
-          <p:nvPr/>
-        </p:nvSpPr>
-        <p:spPr>
-          <a:xfrm>
-            <a:off x="457200" y="274320"/>
-            <a:ext cx="10972800" cy="731520"/>
-          </a:xfrm>
-          <a:prstGeom prst="rect">
-            <a:avLst/>
-          </a:prstGeom>
-          <a:noFill/>
-        </p:spPr>
-        <p:txBody>
-          <a:bodyPr wrap="none">
-            <a:spAutoFit/>
-          </a:bodyPr>
-          <a:lstStyle/>
-          <a:p>
-            <a:pPr>
-              <a:defRPr sz="2400" b="1">
-                <a:solidFill>
-                  <a:srgbClr val="1B2A4A"/>
-                </a:solidFill>
-              </a:defRPr>
-            </a:pPr>
-            <a:r>
-              <a:t>Conclusion &amp; Recommendation</a:t>
+              <a:t>Problem Definition &amp; Approach</a:t>
             </a:r>
           </a:p>
         </p:txBody>
@@ -4696,7 +4285,7 @@
               </a:defRPr>
             </a:pPr>
             <a:r>
-              <a:t>ANSWER: Employees most at risk of burnout have:</a:t>
+              <a:t>Question: Which employees are at risk of burnout?</a:t>
             </a:r>
           </a:p>
           <a:p>
@@ -4710,9 +4299,7 @@
                 </a:solidFill>
               </a:defRPr>
             </a:pPr>
-            <a:r>
-              <a:t>  • High AI task replacement percentage (strongest signal)</a:t>
-            </a:r>
+            <a:endParaRPr/>
           </a:p>
           <a:p>
             <a:pPr>
@@ -4726,7 +4313,7 @@
               </a:defRPr>
             </a:pPr>
             <a:r>
-              <a:t>  • Long daily AI-assisted work hours</a:t>
+              <a:t>Target: burnout_binary — 1 if burnout_score ≥ 75th percentile (top 25%)</a:t>
             </a:r>
           </a:p>
           <a:p>
@@ -4740,9 +4327,7 @@
                 </a:solidFill>
               </a:defRPr>
             </a:pPr>
-            <a:r>
-              <a:t>  • Fear of AI replacement</a:t>
-            </a:r>
+            <a:endParaRPr/>
           </a:p>
           <a:p>
             <a:pPr>
@@ -4756,7 +4341,7 @@
               </a:defRPr>
             </a:pPr>
             <a:r>
-              <a:t>  • Work in EdTech, Gaming, or E-commerce industries</a:t>
+              <a:t>Why top 25%? Natural threshold — identifies employees significantly above</a:t>
             </a:r>
           </a:p>
           <a:p>
@@ -4770,6 +4355,21 @@
                 </a:solidFill>
               </a:defRPr>
             </a:pPr>
+            <a:r>
+              <a:t>the median without being too restrictive. Balances sensitivity vs specificity.</a:t>
+            </a:r>
+          </a:p>
+          <a:p>
+            <a:pPr>
+              <a:spcAft>
+                <a:spcPts val="1000"/>
+              </a:spcAft>
+              <a:defRPr sz="1500">
+                <a:solidFill>
+                  <a:srgbClr val="333333"/>
+                </a:solidFill>
+              </a:defRPr>
+            </a:pPr>
             <a:endParaRPr/>
           </a:p>
           <a:p>
@@ -4784,7 +4384,7 @@
               </a:defRPr>
             </a:pPr>
             <a:r>
-              <a:t>RECOMMENDED MODEL: SVM-RBF (or Logistic Regression)</a:t>
+              <a:t>Features: 62 encoded features (all columns except burnout_score to avoid leakage)</a:t>
             </a:r>
           </a:p>
           <a:p>
@@ -4798,9 +4398,7 @@
                 </a:solidFill>
               </a:defRPr>
             </a:pPr>
-            <a:r>
-              <a:t>  • Catches 85% of burnout cases (Recall = 0.846)</a:t>
-            </a:r>
+            <a:endParaRPr/>
           </a:p>
           <a:p>
             <a:pPr>
@@ -4814,7 +4412,7 @@
               </a:defRPr>
             </a:pPr>
             <a:r>
-              <a:t>  • AUC = 0.913 — excellent discrimination</a:t>
+              <a:t>Models tested: Logistic Regression, Decision Tree, Random Forest,</a:t>
             </a:r>
           </a:p>
           <a:p>
@@ -4829,7 +4427,7 @@
               </a:defRPr>
             </a:pPr>
             <a:r>
-              <a:t>  • Trade-off: More false alarms (Precision = 0.635)</a:t>
+              <a:t>Gradient Boosting, SVM-RBF — all with class_weight='balanced'</a:t>
             </a:r>
           </a:p>
           <a:p>
@@ -4857,110 +4455,7 @@
               </a:defRPr>
             </a:pPr>
             <a:r>
-              <a:t>WHY NOT Gradient Boost (highest weighted F1)?</a:t>
-            </a:r>
-          </a:p>
-          <a:p>
-            <a:pPr>
-              <a:spcAft>
-                <a:spcPts val="1000"/>
-              </a:spcAft>
-              <a:defRPr sz="1500">
-                <a:solidFill>
-                  <a:srgbClr val="333333"/>
-                </a:solidFill>
-              </a:defRPr>
-            </a:pPr>
-            <a:r>
-              <a:t>  • Misses 37% of burnout cases</a:t>
-            </a:r>
-          </a:p>
-          <a:p>
-            <a:pPr>
-              <a:spcAft>
-                <a:spcPts val="1000"/>
-              </a:spcAft>
-              <a:defRPr sz="1500">
-                <a:solidFill>
-                  <a:srgbClr val="333333"/>
-                </a:solidFill>
-              </a:defRPr>
-            </a:pPr>
-            <a:r>
-              <a:t>  • In HR context: missing burnout &gt; unnecessary check-in</a:t>
-            </a:r>
-          </a:p>
-          <a:p>
-            <a:pPr>
-              <a:spcAft>
-                <a:spcPts val="1000"/>
-              </a:spcAft>
-              <a:defRPr sz="1500">
-                <a:solidFill>
-                  <a:srgbClr val="333333"/>
-                </a:solidFill>
-              </a:defRPr>
-            </a:pPr>
-            <a:endParaRPr/>
-          </a:p>
-          <a:p>
-            <a:pPr>
-              <a:spcAft>
-                <a:spcPts val="1000"/>
-              </a:spcAft>
-              <a:defRPr sz="1500">
-                <a:solidFill>
-                  <a:srgbClr val="333333"/>
-                </a:solidFill>
-              </a:defRPr>
-            </a:pPr>
-            <a:r>
-              <a:t>NEXT STEPS:</a:t>
-            </a:r>
-          </a:p>
-          <a:p>
-            <a:pPr>
-              <a:spcAft>
-                <a:spcPts val="1000"/>
-              </a:spcAft>
-              <a:defRPr sz="1500">
-                <a:solidFill>
-                  <a:srgbClr val="333333"/>
-                </a:solidFill>
-              </a:defRPr>
-            </a:pPr>
-            <a:r>
-              <a:t>  • Deploy SVM-RBF with threshold tuning for desired recall level</a:t>
-            </a:r>
-          </a:p>
-          <a:p>
-            <a:pPr>
-              <a:spcAft>
-                <a:spcPts val="1000"/>
-              </a:spcAft>
-              <a:defRPr sz="1500">
-                <a:solidFill>
-                  <a:srgbClr val="333333"/>
-                </a:solidFill>
-              </a:defRPr>
-            </a:pPr>
-            <a:r>
-              <a:t>  • Monitor ai_replaces_my_tasks_pct as early warning indicator</a:t>
-            </a:r>
-          </a:p>
-          <a:p>
-            <a:pPr>
-              <a:spcAft>
-                <a:spcPts val="1000"/>
-              </a:spcAft>
-              <a:defRPr sz="1500">
-                <a:solidFill>
-                  <a:srgbClr val="333333"/>
-                </a:solidFill>
-              </a:defRPr>
-            </a:pPr>
-            <a:r>
-              <a:t>  • Validate on new data — cross-validation suggests stability</a:t>
+              <a:t>Class split: 26.0% burnout (positive) vs 74.0% no burnout</a:t>
             </a:r>
           </a:p>
         </p:txBody>
@@ -5020,7 +4515,8 @@
               </a:defRPr>
             </a:pPr>
             <a:r>
-              <a:t>Problem Definition &amp; Approach</a:t>
+              <a:rPr lang="en-US"/>
+              <a:t>Class Balance &amp; Model Comparison</a:t>
             </a:r>
           </a:p>
         </p:txBody>
@@ -5034,7 +4530,7 @@
         <p:spPr>
           <a:xfrm>
             <a:off x="457200" y="1188720"/>
-            <a:ext cx="10972800" cy="5029200"/>
+            <a:ext cx="5029200" cy="5029200"/>
           </a:xfrm>
           <a:prstGeom prst="rect">
             <a:avLst/>
@@ -5049,230 +4545,243 @@
           <a:p>
             <a:pPr>
               <a:spcAft>
-                <a:spcPts val="1000"/>
-              </a:spcAft>
-              <a:defRPr sz="1500">
-                <a:solidFill>
-                  <a:srgbClr val="333333"/>
-                </a:solidFill>
-              </a:defRPr>
-            </a:pPr>
-            <a:r>
-              <a:rPr dirty="0"/>
-              <a:t>Question: Which employees are at risk of burnout?</a:t>
-            </a:r>
-          </a:p>
-          <a:p>
-            <a:pPr>
-              <a:spcAft>
-                <a:spcPts val="1000"/>
-              </a:spcAft>
-              <a:defRPr sz="1500">
-                <a:solidFill>
-                  <a:srgbClr val="333333"/>
-                </a:solidFill>
-              </a:defRPr>
-            </a:pPr>
-            <a:endParaRPr dirty="0"/>
-          </a:p>
-          <a:p>
-            <a:pPr>
-              <a:spcAft>
-                <a:spcPts val="1000"/>
-              </a:spcAft>
-              <a:defRPr sz="1500">
-                <a:solidFill>
-                  <a:srgbClr val="333333"/>
-                </a:solidFill>
-              </a:defRPr>
-            </a:pPr>
-            <a:r>
-              <a:rPr dirty="0"/>
-              <a:t>Target: </a:t>
-            </a:r>
-            <a:r>
-              <a:rPr dirty="0" err="1"/>
-              <a:t>burnout_binary</a:t>
-            </a:r>
-            <a:r>
-              <a:rPr dirty="0"/>
-              <a:t> — 1 if </a:t>
-            </a:r>
-            <a:r>
-              <a:rPr dirty="0" err="1"/>
-              <a:t>burnout_score</a:t>
-            </a:r>
-            <a:r>
-              <a:rPr dirty="0"/>
-              <a:t> ≥ 75th percentile (top 25%)</a:t>
-            </a:r>
-          </a:p>
-          <a:p>
-            <a:pPr>
-              <a:spcAft>
-                <a:spcPts val="1000"/>
-              </a:spcAft>
-              <a:defRPr sz="1500">
-                <a:solidFill>
-                  <a:srgbClr val="333333"/>
-                </a:solidFill>
-              </a:defRPr>
-            </a:pPr>
-            <a:endParaRPr dirty="0"/>
-          </a:p>
-          <a:p>
-            <a:pPr>
-              <a:spcAft>
-                <a:spcPts val="1000"/>
-              </a:spcAft>
-              <a:defRPr sz="1500">
-                <a:solidFill>
-                  <a:srgbClr val="333333"/>
-                </a:solidFill>
-              </a:defRPr>
-            </a:pPr>
-            <a:r>
-              <a:rPr dirty="0"/>
-              <a:t>Why top 25%? Natural threshold — identifies employees significantly above</a:t>
-            </a:r>
-          </a:p>
-          <a:p>
-            <a:pPr>
-              <a:spcAft>
-                <a:spcPts val="1000"/>
-              </a:spcAft>
-              <a:defRPr sz="1500">
-                <a:solidFill>
-                  <a:srgbClr val="333333"/>
-                </a:solidFill>
-              </a:defRPr>
-            </a:pPr>
-            <a:r>
-              <a:rPr dirty="0"/>
-              <a:t>the median without being too restrictive. Balances sensitivity vs specificity.</a:t>
-            </a:r>
-          </a:p>
-          <a:p>
-            <a:pPr>
-              <a:spcAft>
-                <a:spcPts val="1000"/>
-              </a:spcAft>
-              <a:defRPr sz="1500">
-                <a:solidFill>
-                  <a:srgbClr val="333333"/>
-                </a:solidFill>
-              </a:defRPr>
-            </a:pPr>
-            <a:endParaRPr dirty="0"/>
-          </a:p>
-          <a:p>
-            <a:pPr>
-              <a:spcAft>
-                <a:spcPts val="1000"/>
-              </a:spcAft>
-              <a:defRPr sz="1500">
-                <a:solidFill>
-                  <a:srgbClr val="333333"/>
-                </a:solidFill>
-              </a:defRPr>
-            </a:pPr>
-            <a:r>
-              <a:rPr dirty="0"/>
-              <a:t>Features: 62 encoded features (all columns except </a:t>
-            </a:r>
-            <a:r>
-              <a:rPr dirty="0" err="1"/>
-              <a:t>burnout_score</a:t>
-            </a:r>
-            <a:r>
-              <a:rPr dirty="0"/>
-              <a:t> to avoid leakage)</a:t>
-            </a:r>
-          </a:p>
-          <a:p>
-            <a:pPr>
-              <a:spcAft>
-                <a:spcPts val="1000"/>
-              </a:spcAft>
-              <a:defRPr sz="1500">
-                <a:solidFill>
-                  <a:srgbClr val="333333"/>
-                </a:solidFill>
-              </a:defRPr>
-            </a:pPr>
-            <a:endParaRPr dirty="0"/>
-          </a:p>
-          <a:p>
-            <a:pPr>
-              <a:spcAft>
-                <a:spcPts val="1000"/>
-              </a:spcAft>
-              <a:defRPr sz="1500">
-                <a:solidFill>
-                  <a:srgbClr val="333333"/>
-                </a:solidFill>
-              </a:defRPr>
-            </a:pPr>
-            <a:r>
-              <a:rPr dirty="0"/>
-              <a:t>Models tested: Logistic Regression, Decision Tree, Random Forest,</a:t>
-            </a:r>
-          </a:p>
-          <a:p>
-            <a:pPr>
-              <a:spcAft>
-                <a:spcPts val="1000"/>
-              </a:spcAft>
-              <a:defRPr sz="1500">
-                <a:solidFill>
-                  <a:srgbClr val="333333"/>
-                </a:solidFill>
-              </a:defRPr>
-            </a:pPr>
-            <a:r>
-              <a:rPr dirty="0"/>
-              <a:t>Gradient Boosting, SVM-RBF — all with </a:t>
-            </a:r>
-            <a:r>
-              <a:rPr dirty="0" err="1"/>
-              <a:t>class_weight</a:t>
-            </a:r>
-            <a:r>
-              <a:rPr dirty="0"/>
-              <a:t>='balanced'</a:t>
-            </a:r>
-          </a:p>
-          <a:p>
-            <a:pPr>
-              <a:spcAft>
-                <a:spcPts val="1000"/>
-              </a:spcAft>
-              <a:defRPr sz="1500">
-                <a:solidFill>
-                  <a:srgbClr val="333333"/>
-                </a:solidFill>
-              </a:defRPr>
-            </a:pPr>
-            <a:endParaRPr dirty="0"/>
-          </a:p>
-          <a:p>
-            <a:pPr>
-              <a:spcAft>
-                <a:spcPts val="1000"/>
-              </a:spcAft>
-              <a:defRPr sz="1500">
-                <a:solidFill>
-                  <a:srgbClr val="333333"/>
-                </a:solidFill>
-              </a:defRPr>
-            </a:pPr>
-            <a:r>
-              <a:rPr dirty="0"/>
-              <a:t>Class split: 26.0% burnout (positive) vs 74.0% no burnout</a:t>
-            </a:r>
-          </a:p>
-        </p:txBody>
-      </p:sp>
+                <a:spcPts val="800"/>
+              </a:spcAft>
+              <a:defRPr sz="1300">
+                <a:solidFill>
+                  <a:srgbClr val="333333"/>
+                </a:solidFill>
+              </a:defRPr>
+            </a:pPr>
+            <a:r>
+              <a:rPr lang="en-US"/>
+              <a:t>Class split: 26.0% Burnout vs 74.0% No Burnout (ratio=0.35)</a:t>
+            </a:r>
+          </a:p>
+          <a:p>
+            <a:pPr>
+              <a:spcAft>
+                <a:spcPts val="800"/>
+              </a:spcAft>
+              <a:defRPr sz="1300">
+                <a:solidFill>
+                  <a:srgbClr val="333333"/>
+                </a:solidFill>
+              </a:defRPr>
+            </a:pPr>
+            <a:r>
+              <a:rPr lang="en-US"/>
+              <a:t>• Moderate imbalance → used class_weight='balanced'</a:t>
+            </a:r>
+          </a:p>
+          <a:p>
+            <a:pPr>
+              <a:spcAft>
+                <a:spcPts val="800"/>
+              </a:spcAft>
+              <a:defRPr sz="1300">
+                <a:solidFill>
+                  <a:srgbClr val="333333"/>
+                </a:solidFill>
+              </a:defRPr>
+            </a:pPr>
+            <a:endParaRPr lang="en-US"/>
+          </a:p>
+          <a:p>
+            <a:pPr>
+              <a:spcAft>
+                <a:spcPts val="800"/>
+              </a:spcAft>
+              <a:defRPr sz="1300">
+                <a:solidFill>
+                  <a:srgbClr val="333333"/>
+                </a:solidFill>
+              </a:defRPr>
+            </a:pPr>
+            <a:r>
+              <a:rPr lang="en-US"/>
+              <a:t>Top performer (weighted F1): Gradient Boost — 84.6%</a:t>
+            </a:r>
+          </a:p>
+          <a:p>
+            <a:pPr>
+              <a:spcAft>
+                <a:spcPts val="800"/>
+              </a:spcAft>
+              <a:defRPr sz="1300">
+                <a:solidFill>
+                  <a:srgbClr val="333333"/>
+                </a:solidFill>
+              </a:defRPr>
+            </a:pPr>
+            <a:endParaRPr lang="en-US"/>
+          </a:p>
+          <a:p>
+            <a:pPr>
+              <a:spcAft>
+                <a:spcPts val="800"/>
+              </a:spcAft>
+              <a:defRPr sz="1300">
+                <a:solidFill>
+                  <a:srgbClr val="333333"/>
+                </a:solidFill>
+              </a:defRPr>
+            </a:pPr>
+            <a:r>
+              <a:rPr lang="en-US"/>
+              <a:t>⚠️ PITFALL: Weighted F1 hides minority class performance!</a:t>
+            </a:r>
+          </a:p>
+          <a:p>
+            <a:pPr>
+              <a:spcAft>
+                <a:spcPts val="800"/>
+              </a:spcAft>
+              <a:defRPr sz="1300">
+                <a:solidFill>
+                  <a:srgbClr val="333333"/>
+                </a:solidFill>
+              </a:defRPr>
+            </a:pPr>
+            <a:r>
+              <a:rPr lang="en-US"/>
+              <a:t>• Dominated by majority class (74% No Burnout)</a:t>
+            </a:r>
+          </a:p>
+          <a:p>
+            <a:pPr>
+              <a:spcAft>
+                <a:spcPts val="800"/>
+              </a:spcAft>
+              <a:defRPr sz="1300">
+                <a:solidFill>
+                  <a:srgbClr val="333333"/>
+                </a:solidFill>
+              </a:defRPr>
+            </a:pPr>
+            <a:r>
+              <a:rPr lang="en-US"/>
+              <a:t>• Gradient Boost looks best here but misses 37% of burnout</a:t>
+            </a:r>
+          </a:p>
+          <a:p>
+            <a:pPr>
+              <a:spcAft>
+                <a:spcPts val="800"/>
+              </a:spcAft>
+              <a:defRPr sz="1300">
+                <a:solidFill>
+                  <a:srgbClr val="333333"/>
+                </a:solidFill>
+              </a:defRPr>
+            </a:pPr>
+            <a:r>
+              <a:rPr lang="en-US"/>
+              <a:t>• Need per-class breakdown to see real detection ability</a:t>
+            </a:r>
+          </a:p>
+          <a:p>
+            <a:pPr>
+              <a:spcAft>
+                <a:spcPts val="800"/>
+              </a:spcAft>
+              <a:defRPr sz="1300">
+                <a:solidFill>
+                  <a:srgbClr val="333333"/>
+                </a:solidFill>
+              </a:defRPr>
+            </a:pPr>
+            <a:endParaRPr lang="en-US"/>
+          </a:p>
+          <a:p>
+            <a:pPr>
+              <a:spcAft>
+                <a:spcPts val="800"/>
+              </a:spcAft>
+              <a:defRPr sz="1300">
+                <a:solidFill>
+                  <a:srgbClr val="333333"/>
+                </a:solidFill>
+              </a:defRPr>
+            </a:pPr>
+            <a:r>
+              <a:rPr lang="en-US"/>
+              <a:t>Key: Accuracy alone is misleading — predicting 'No Burnout'</a:t>
+            </a:r>
+          </a:p>
+          <a:p>
+            <a:pPr>
+              <a:spcAft>
+                <a:spcPts val="800"/>
+              </a:spcAft>
+              <a:defRPr sz="1300">
+                <a:solidFill>
+                  <a:srgbClr val="333333"/>
+                </a:solidFill>
+              </a:defRPr>
+            </a:pPr>
+            <a:r>
+              <a:rPr lang="en-US"/>
+              <a:t>for everyone gets ~74% accuracy but catches 0 burnout cases.</a:t>
+            </a:r>
+            <a:endParaRPr lang="en-US" dirty="0"/>
+          </a:p>
+        </p:txBody>
+      </p:sp>
+      <p:pic>
+        <p:nvPicPr>
+          <p:cNvPr id="4" name="Picture 3" descr="balance_and_comparison.png"/>
+          <p:cNvPicPr>
+            <a:picLocks noChangeAspect="1"/>
+          </p:cNvPicPr>
+          <p:nvPr/>
+        </p:nvPicPr>
+        <p:blipFill>
+          <a:blip r:embed="rId3"/>
+          <a:stretch>
+            <a:fillRect/>
+          </a:stretch>
+        </p:blipFill>
+        <p:spPr>
+          <a:xfrm>
+            <a:off x="5669280" y="1097280"/>
+            <a:ext cx="6217920" cy="2174475"/>
+          </a:xfrm>
+          <a:prstGeom prst="rect">
+            <a:avLst/>
+          </a:prstGeom>
+        </p:spPr>
+      </p:pic>
+      <p:pic>
+        <p:nvPicPr>
+          <p:cNvPr id="5" name="Picture 4" descr="confusion_matrices.png">
+            <a:extLst>
+              <a:ext uri="{FF2B5EF4-FFF2-40B4-BE49-F238E27FC236}">
+                <a16:creationId xmlns:a16="http://schemas.microsoft.com/office/drawing/2014/main" id="{B0BB773D-8357-2387-9720-A02370566A73}"/>
+              </a:ext>
+            </a:extLst>
+          </p:cNvPr>
+          <p:cNvPicPr>
+            <a:picLocks noChangeAspect="1"/>
+          </p:cNvPicPr>
+          <p:nvPr/>
+        </p:nvPicPr>
+        <p:blipFill>
+          <a:blip r:embed="rId4"/>
+          <a:stretch>
+            <a:fillRect/>
+          </a:stretch>
+        </p:blipFill>
+        <p:spPr>
+          <a:xfrm>
+            <a:off x="5987143" y="3429000"/>
+            <a:ext cx="5747657" cy="3248297"/>
+          </a:xfrm>
+          <a:prstGeom prst="rect">
+            <a:avLst/>
+          </a:prstGeom>
+        </p:spPr>
+      </p:pic>
     </p:spTree>
   </p:cSld>
   <p:clrMapOvr>
@@ -5328,7 +4837,7 @@
               </a:defRPr>
             </a:pPr>
             <a:r>
-              <a:t>Class Balance Check</a:t>
+              <a:t>Per-Class Performance — Burnout Detection Focus</a:t>
             </a:r>
           </a:p>
         </p:txBody>
@@ -5366,7 +4875,8 @@
               </a:defRPr>
             </a:pPr>
             <a:r>
-              <a:t>Positive class (Burnout): 388 samples (26.0%)</a:t>
+              <a:rPr dirty="0"/>
+              <a:t>Weighted metrics hide minority class performance.</a:t>
             </a:r>
           </a:p>
           <a:p>
@@ -5381,7 +4891,8 @@
               </a:defRPr>
             </a:pPr>
             <a:r>
-              <a:t>Negative class (No Burnout): 1103 samples (74.0%)</a:t>
+              <a:rPr dirty="0"/>
+              <a:t>Per-class breakdown reveals the real story:</a:t>
             </a:r>
           </a:p>
           <a:p>
@@ -5395,7 +4906,7 @@
                 </a:solidFill>
               </a:defRPr>
             </a:pPr>
-            <a:endParaRPr/>
+            <a:endParaRPr dirty="0"/>
           </a:p>
           <a:p>
             <a:pPr>
@@ -5409,7 +4920,16 @@
               </a:defRPr>
             </a:pPr>
             <a:r>
-              <a:t>Imbalance ratio: 0.35 (moderate)</a:t>
+              <a:rPr dirty="0"/>
+              <a:t>Model           | Burnout </a:t>
+            </a:r>
+            <a:r>
+              <a:rPr dirty="0" err="1"/>
+              <a:t>Prec</a:t>
+            </a:r>
+            <a:r>
+              <a:rPr dirty="0"/>
+              <a:t> | Recall | F1</a:t>
             </a:r>
           </a:p>
           <a:p>
@@ -5423,7 +4943,10 @@
                 </a:solidFill>
               </a:defRPr>
             </a:pPr>
-            <a:endParaRPr/>
+            <a:r>
+              <a:rPr dirty="0"/>
+              <a:t>—————————————————————————————————————————————</a:t>
+            </a:r>
           </a:p>
           <a:p>
             <a:pPr>
@@ -5437,7 +4960,8 @@
               </a:defRPr>
             </a:pPr>
             <a:r>
-              <a:t>Thought process:</a:t>
+              <a:rPr dirty="0"/>
+              <a:t>SVM-RBF         |   0.635      | 0.846  | 0.725 ← BEST</a:t>
             </a:r>
           </a:p>
           <a:p>
@@ -5452,7 +4976,8 @@
               </a:defRPr>
             </a:pPr>
             <a:r>
-              <a:t>• 74/26 split is moderately imbalanced</a:t>
+              <a:rPr dirty="0"/>
+              <a:t>Logistic Reg    |   0.640      | 0.821  | 0.719</a:t>
             </a:r>
           </a:p>
           <a:p>
@@ -5467,7 +4992,8 @@
               </a:defRPr>
             </a:pPr>
             <a:r>
-              <a:t>• Without handling, models will bias toward majority class</a:t>
+              <a:rPr dirty="0"/>
+              <a:t>Gradient Boost  |   0.742      | 0.628  | 0.681</a:t>
             </a:r>
           </a:p>
           <a:p>
@@ -5482,7 +5008,8 @@
               </a:defRPr>
             </a:pPr>
             <a:r>
-              <a:t>• Solution: class_weight='balanced' penalizes misclassifying minority</a:t>
+              <a:rPr dirty="0"/>
+              <a:t>Random Forest   |   0.830      | 0.500  | 0.624</a:t>
             </a:r>
           </a:p>
           <a:p>
@@ -5496,7 +5023,10 @@
                 </a:solidFill>
               </a:defRPr>
             </a:pPr>
-            <a:endParaRPr/>
+            <a:r>
+              <a:rPr dirty="0"/>
+              <a:t>Decision Tree   |   0.567      | 0.487  | 0.524</a:t>
+            </a:r>
           </a:p>
           <a:p>
             <a:pPr>
@@ -5509,9 +5039,7 @@
                 </a:solidFill>
               </a:defRPr>
             </a:pPr>
-            <a:r>
-              <a:t>Pitfall: Accuracy alone is misleading here — a model predicting</a:t>
-            </a:r>
+            <a:endParaRPr dirty="0"/>
           </a:p>
           <a:p>
             <a:pPr>
@@ -5525,116 +5053,10 @@
               </a:defRPr>
             </a:pPr>
             <a:r>
-              <a:t>'No Burnout' for everyone gets ~74% accuracy but catches 0 cases.</a:t>
-            </a:r>
-          </a:p>
-        </p:txBody>
-      </p:sp>
-      <p:pic>
-        <p:nvPicPr>
-          <p:cNvPr id="4" name="Picture 3" descr="class_balance.png"/>
-          <p:cNvPicPr>
-            <a:picLocks noChangeAspect="1"/>
-          </p:cNvPicPr>
-          <p:nvPr/>
-        </p:nvPicPr>
-        <p:blipFill>
-          <a:blip r:embed="rId3"/>
-          <a:stretch>
-            <a:fillRect/>
-          </a:stretch>
-        </p:blipFill>
-        <p:spPr>
-          <a:xfrm>
-            <a:off x="5669280" y="1097280"/>
-            <a:ext cx="6217920" cy="3484702"/>
-          </a:xfrm>
-          <a:prstGeom prst="rect">
-            <a:avLst/>
-          </a:prstGeom>
-        </p:spPr>
-      </p:pic>
-    </p:spTree>
-  </p:cSld>
-  <p:clrMapOvr>
-    <a:masterClrMapping/>
-  </p:clrMapOvr>
-</p:sld>
-</file>
-
-<file path=ppt/slides/slide4.xml><?xml version="1.0" encoding="utf-8"?>
-<p:sld xmlns:a="http://schemas.openxmlformats.org/drawingml/2006/main" xmlns:r="http://schemas.openxmlformats.org/officeDocument/2006/relationships" xmlns:p="http://schemas.openxmlformats.org/presentationml/2006/main">
-  <p:cSld>
-    <p:spTree>
-      <p:nvGrpSpPr>
-        <p:cNvPr id="1" name=""/>
-        <p:cNvGrpSpPr/>
-        <p:nvPr/>
-      </p:nvGrpSpPr>
-      <p:grpSpPr>
-        <a:xfrm>
-          <a:off x="0" y="0"/>
-          <a:ext cx="0" cy="0"/>
-          <a:chOff x="0" y="0"/>
-          <a:chExt cx="0" cy="0"/>
-        </a:xfrm>
-      </p:grpSpPr>
-      <p:sp>
-        <p:nvSpPr>
-          <p:cNvPr id="2" name="TextBox 1"/>
-          <p:cNvSpPr txBox="1"/>
-          <p:nvPr/>
-        </p:nvSpPr>
-        <p:spPr>
-          <a:xfrm>
-            <a:off x="457200" y="274320"/>
-            <a:ext cx="10972800" cy="731520"/>
-          </a:xfrm>
-          <a:prstGeom prst="rect">
-            <a:avLst/>
-          </a:prstGeom>
-          <a:noFill/>
-        </p:spPr>
-        <p:txBody>
-          <a:bodyPr wrap="none">
-            <a:spAutoFit/>
-          </a:bodyPr>
-          <a:lstStyle/>
-          <a:p>
-            <a:pPr>
-              <a:defRPr sz="2400" b="1">
-                <a:solidFill>
-                  <a:srgbClr val="1B2A4A"/>
-                </a:solidFill>
-              </a:defRPr>
-            </a:pPr>
-            <a:r>
-              <a:t>Model Comparison — Weighted Metrics</a:t>
-            </a:r>
-          </a:p>
-        </p:txBody>
-      </p:sp>
-      <p:sp>
-        <p:nvSpPr>
-          <p:cNvPr id="3" name="TextBox 2"/>
-          <p:cNvSpPr txBox="1"/>
-          <p:nvPr/>
-        </p:nvSpPr>
-        <p:spPr>
-          <a:xfrm>
-            <a:off x="457200" y="1188720"/>
-            <a:ext cx="5029200" cy="3924151"/>
-          </a:xfrm>
-          <a:prstGeom prst="rect">
-            <a:avLst/>
-          </a:prstGeom>
-          <a:noFill/>
-        </p:spPr>
-        <p:txBody>
-          <a:bodyPr wrap="square">
-            <a:spAutoFit/>
-          </a:bodyPr>
-          <a:lstStyle/>
+              <a:rPr dirty="0"/>
+              <a:t>⚠️ Gradient Boost looks #1 on weighted F1 but misses 37%</a:t>
+            </a:r>
+          </a:p>
           <a:p>
             <a:pPr>
               <a:spcAft>
@@ -5648,7 +5070,7 @@
             </a:pPr>
             <a:r>
               <a:rPr dirty="0"/>
-              <a:t>All 5 models compared on standard metrics.</a:t>
+              <a:t>of burnout cases. SVM-RBF/Logistic Reg catch 82-85%.</a:t>
             </a:r>
           </a:p>
           <a:p>
@@ -5677,556 +5099,7 @@
             </a:pPr>
             <a:r>
               <a:rPr dirty="0"/>
-              <a:t>Top performer (weighted F1): Gradient Boosting — 84.6% accuracy</a:t>
-            </a:r>
-          </a:p>
-          <a:p>
-            <a:pPr>
-              <a:spcAft>
-                <a:spcPts val="800"/>
-              </a:spcAft>
-              <a:defRPr sz="1300">
-                <a:solidFill>
-                  <a:srgbClr val="333333"/>
-                </a:solidFill>
-              </a:defRPr>
-            </a:pPr>
-            <a:endParaRPr dirty="0"/>
-          </a:p>
-          <a:p>
-            <a:pPr>
-              <a:spcAft>
-                <a:spcPts val="800"/>
-              </a:spcAft>
-              <a:defRPr sz="1300">
-                <a:solidFill>
-                  <a:srgbClr val="333333"/>
-                </a:solidFill>
-              </a:defRPr>
-            </a:pPr>
-            <a:r>
-              <a:rPr dirty="0"/>
-              <a:t>Thought process:</a:t>
-            </a:r>
-          </a:p>
-          <a:p>
-            <a:pPr>
-              <a:spcAft>
-                <a:spcPts val="800"/>
-              </a:spcAft>
-              <a:defRPr sz="1300">
-                <a:solidFill>
-                  <a:srgbClr val="333333"/>
-                </a:solidFill>
-              </a:defRPr>
-            </a:pPr>
-            <a:r>
-              <a:rPr dirty="0"/>
-              <a:t>• Weighted metrics average by class size</a:t>
-            </a:r>
-          </a:p>
-          <a:p>
-            <a:pPr>
-              <a:spcAft>
-                <a:spcPts val="800"/>
-              </a:spcAft>
-              <a:defRPr sz="1300">
-                <a:solidFill>
-                  <a:srgbClr val="333333"/>
-                </a:solidFill>
-              </a:defRPr>
-            </a:pPr>
-            <a:r>
-              <a:rPr dirty="0"/>
-              <a:t>• Dominated by majority class (No Burnout = 74%)</a:t>
-            </a:r>
-          </a:p>
-          <a:p>
-            <a:pPr>
-              <a:spcAft>
-                <a:spcPts val="800"/>
-              </a:spcAft>
-              <a:defRPr sz="1300">
-                <a:solidFill>
-                  <a:srgbClr val="333333"/>
-                </a:solidFill>
-              </a:defRPr>
-            </a:pPr>
-            <a:endParaRPr dirty="0"/>
-          </a:p>
-          <a:p>
-            <a:pPr>
-              <a:spcAft>
-                <a:spcPts val="800"/>
-              </a:spcAft>
-              <a:defRPr sz="1300">
-                <a:solidFill>
-                  <a:srgbClr val="333333"/>
-                </a:solidFill>
-              </a:defRPr>
-            </a:pPr>
-            <a:r>
-              <a:rPr dirty="0"/>
-              <a:t>⚠️ PITFALL: Weighted F1 hides minority class performance!</a:t>
-            </a:r>
-          </a:p>
-          <a:p>
-            <a:pPr>
-              <a:spcAft>
-                <a:spcPts val="800"/>
-              </a:spcAft>
-              <a:defRPr sz="1300">
-                <a:solidFill>
-                  <a:srgbClr val="333333"/>
-                </a:solidFill>
-              </a:defRPr>
-            </a:pPr>
-            <a:r>
-              <a:rPr dirty="0"/>
-              <a:t>Gradient Boost looks best here but we need per-class breakdown</a:t>
-            </a:r>
-          </a:p>
-          <a:p>
-            <a:pPr>
-              <a:spcAft>
-                <a:spcPts val="800"/>
-              </a:spcAft>
-              <a:defRPr sz="1300">
-                <a:solidFill>
-                  <a:srgbClr val="333333"/>
-                </a:solidFill>
-              </a:defRPr>
-            </a:pPr>
-            <a:r>
-              <a:rPr dirty="0"/>
-              <a:t>to see if it </a:t>
-            </a:r>
-            <a:r>
-              <a:rPr lang="en-US" dirty="0"/>
-              <a:t>catches</a:t>
-            </a:r>
-            <a:r>
-              <a:rPr dirty="0"/>
-              <a:t> burnout employees.</a:t>
-            </a:r>
-          </a:p>
-          <a:p>
-            <a:pPr>
-              <a:spcAft>
-                <a:spcPts val="800"/>
-              </a:spcAft>
-              <a:defRPr sz="1300">
-                <a:solidFill>
-                  <a:srgbClr val="333333"/>
-                </a:solidFill>
-              </a:defRPr>
-            </a:pPr>
-            <a:endParaRPr dirty="0"/>
-          </a:p>
-          <a:p>
-            <a:pPr>
-              <a:spcAft>
-                <a:spcPts val="800"/>
-              </a:spcAft>
-              <a:defRPr sz="1300">
-                <a:solidFill>
-                  <a:srgbClr val="333333"/>
-                </a:solidFill>
-              </a:defRPr>
-            </a:pPr>
-            <a:r>
-              <a:rPr dirty="0"/>
-              <a:t>Cross-validation F1 confirms stability (low variance across folds).</a:t>
-            </a:r>
-          </a:p>
-        </p:txBody>
-      </p:sp>
-      <p:pic>
-        <p:nvPicPr>
-          <p:cNvPr id="4" name="Picture 3" descr="model_comparison.png"/>
-          <p:cNvPicPr>
-            <a:picLocks noChangeAspect="1"/>
-          </p:cNvPicPr>
-          <p:nvPr/>
-        </p:nvPicPr>
-        <p:blipFill>
-          <a:blip r:embed="rId3"/>
-          <a:stretch>
-            <a:fillRect/>
-          </a:stretch>
-        </p:blipFill>
-        <p:spPr>
-          <a:xfrm>
-            <a:off x="5669280" y="1097280"/>
-            <a:ext cx="6217920" cy="3058408"/>
-          </a:xfrm>
-          <a:prstGeom prst="rect">
-            <a:avLst/>
-          </a:prstGeom>
-        </p:spPr>
-      </p:pic>
-    </p:spTree>
-  </p:cSld>
-  <p:clrMapOvr>
-    <a:masterClrMapping/>
-  </p:clrMapOvr>
-</p:sld>
-</file>
-
-<file path=ppt/slides/slide5.xml><?xml version="1.0" encoding="utf-8"?>
-<p:sld xmlns:a="http://schemas.openxmlformats.org/drawingml/2006/main" xmlns:r="http://schemas.openxmlformats.org/officeDocument/2006/relationships" xmlns:p="http://schemas.openxmlformats.org/presentationml/2006/main">
-  <p:cSld>
-    <p:spTree>
-      <p:nvGrpSpPr>
-        <p:cNvPr id="1" name=""/>
-        <p:cNvGrpSpPr/>
-        <p:nvPr/>
-      </p:nvGrpSpPr>
-      <p:grpSpPr>
-        <a:xfrm>
-          <a:off x="0" y="0"/>
-          <a:ext cx="0" cy="0"/>
-          <a:chOff x="0" y="0"/>
-          <a:chExt cx="0" cy="0"/>
-        </a:xfrm>
-      </p:grpSpPr>
-      <p:sp>
-        <p:nvSpPr>
-          <p:cNvPr id="2" name="TextBox 1"/>
-          <p:cNvSpPr txBox="1"/>
-          <p:nvPr/>
-        </p:nvSpPr>
-        <p:spPr>
-          <a:xfrm>
-            <a:off x="457200" y="274320"/>
-            <a:ext cx="10972800" cy="731520"/>
-          </a:xfrm>
-          <a:prstGeom prst="rect">
-            <a:avLst/>
-          </a:prstGeom>
-          <a:noFill/>
-        </p:spPr>
-        <p:txBody>
-          <a:bodyPr wrap="none">
-            <a:spAutoFit/>
-          </a:bodyPr>
-          <a:lstStyle/>
-          <a:p>
-            <a:pPr>
-              <a:defRPr sz="2400" b="1">
-                <a:solidFill>
-                  <a:srgbClr val="1B2A4A"/>
-                </a:solidFill>
-              </a:defRPr>
-            </a:pPr>
-            <a:r>
-              <a:t>Confusion Matrices — Visual Comparison</a:t>
-            </a:r>
-          </a:p>
-        </p:txBody>
-      </p:sp>
-      <p:pic>
-        <p:nvPicPr>
-          <p:cNvPr id="3" name="Picture 2" descr="confusion_matrices.png"/>
-          <p:cNvPicPr>
-            <a:picLocks noChangeAspect="1"/>
-          </p:cNvPicPr>
-          <p:nvPr/>
-        </p:nvPicPr>
-        <p:blipFill>
-          <a:blip r:embed="rId3"/>
-          <a:stretch>
-            <a:fillRect/>
-          </a:stretch>
-        </p:blipFill>
-        <p:spPr>
-          <a:xfrm>
-            <a:off x="457200" y="1188720"/>
-            <a:ext cx="11062138" cy="5303520"/>
-          </a:xfrm>
-          <a:prstGeom prst="rect">
-            <a:avLst/>
-          </a:prstGeom>
-        </p:spPr>
-      </p:pic>
-    </p:spTree>
-  </p:cSld>
-  <p:clrMapOvr>
-    <a:masterClrMapping/>
-  </p:clrMapOvr>
-</p:sld>
-</file>
-
-<file path=ppt/slides/slide6.xml><?xml version="1.0" encoding="utf-8"?>
-<p:sld xmlns:a="http://schemas.openxmlformats.org/drawingml/2006/main" xmlns:r="http://schemas.openxmlformats.org/officeDocument/2006/relationships" xmlns:p="http://schemas.openxmlformats.org/presentationml/2006/main">
-  <p:cSld>
-    <p:spTree>
-      <p:nvGrpSpPr>
-        <p:cNvPr id="1" name=""/>
-        <p:cNvGrpSpPr/>
-        <p:nvPr/>
-      </p:nvGrpSpPr>
-      <p:grpSpPr>
-        <a:xfrm>
-          <a:off x="0" y="0"/>
-          <a:ext cx="0" cy="0"/>
-          <a:chOff x="0" y="0"/>
-          <a:chExt cx="0" cy="0"/>
-        </a:xfrm>
-      </p:grpSpPr>
-      <p:sp>
-        <p:nvSpPr>
-          <p:cNvPr id="2" name="TextBox 1"/>
-          <p:cNvSpPr txBox="1"/>
-          <p:nvPr/>
-        </p:nvSpPr>
-        <p:spPr>
-          <a:xfrm>
-            <a:off x="457200" y="274320"/>
-            <a:ext cx="10972800" cy="731520"/>
-          </a:xfrm>
-          <a:prstGeom prst="rect">
-            <a:avLst/>
-          </a:prstGeom>
-          <a:noFill/>
-        </p:spPr>
-        <p:txBody>
-          <a:bodyPr wrap="none">
-            <a:spAutoFit/>
-          </a:bodyPr>
-          <a:lstStyle/>
-          <a:p>
-            <a:pPr>
-              <a:defRPr sz="2400" b="1">
-                <a:solidFill>
-                  <a:srgbClr val="1B2A4A"/>
-                </a:solidFill>
-              </a:defRPr>
-            </a:pPr>
-            <a:r>
-              <a:t>Per-Class F1 — The Real Story</a:t>
-            </a:r>
-          </a:p>
-        </p:txBody>
-      </p:sp>
-      <p:sp>
-        <p:nvSpPr>
-          <p:cNvPr id="3" name="TextBox 2"/>
-          <p:cNvSpPr txBox="1"/>
-          <p:nvPr/>
-        </p:nvSpPr>
-        <p:spPr>
-          <a:xfrm>
-            <a:off x="457200" y="1188720"/>
-            <a:ext cx="5029200" cy="5029200"/>
-          </a:xfrm>
-          <a:prstGeom prst="rect">
-            <a:avLst/>
-          </a:prstGeom>
-          <a:noFill/>
-        </p:spPr>
-        <p:txBody>
-          <a:bodyPr wrap="square">
-            <a:spAutoFit/>
-          </a:bodyPr>
-          <a:lstStyle/>
-          <a:p>
-            <a:pPr>
-              <a:spcAft>
-                <a:spcPts val="800"/>
-              </a:spcAft>
-              <a:defRPr sz="1300">
-                <a:solidFill>
-                  <a:srgbClr val="333333"/>
-                </a:solidFill>
-              </a:defRPr>
-            </a:pPr>
-            <a:r>
-              <a:rPr dirty="0"/>
-              <a:t>This heatmap reveals what weighted metrics hid:</a:t>
-            </a:r>
-          </a:p>
-          <a:p>
-            <a:pPr>
-              <a:spcAft>
-                <a:spcPts val="800"/>
-              </a:spcAft>
-              <a:defRPr sz="1300">
-                <a:solidFill>
-                  <a:srgbClr val="333333"/>
-                </a:solidFill>
-              </a:defRPr>
-            </a:pPr>
-            <a:endParaRPr dirty="0"/>
-          </a:p>
-          <a:p>
-            <a:pPr>
-              <a:spcAft>
-                <a:spcPts val="800"/>
-              </a:spcAft>
-              <a:defRPr sz="1300">
-                <a:solidFill>
-                  <a:srgbClr val="333333"/>
-                </a:solidFill>
-              </a:defRPr>
-            </a:pPr>
-            <a:r>
-              <a:rPr dirty="0"/>
-              <a:t>• SVM-RBF: Best Burnout F1 (0.725) — catches most cases</a:t>
-            </a:r>
-          </a:p>
-          <a:p>
-            <a:pPr>
-              <a:spcAft>
-                <a:spcPts val="800"/>
-              </a:spcAft>
-              <a:defRPr sz="1300">
-                <a:solidFill>
-                  <a:srgbClr val="333333"/>
-                </a:solidFill>
-              </a:defRPr>
-            </a:pPr>
-            <a:r>
-              <a:rPr dirty="0"/>
-              <a:t>• Logistic Reg: Close second (0.719) — simpler model</a:t>
-            </a:r>
-          </a:p>
-          <a:p>
-            <a:pPr>
-              <a:spcAft>
-                <a:spcPts val="800"/>
-              </a:spcAft>
-              <a:defRPr sz="1300">
-                <a:solidFill>
-                  <a:srgbClr val="333333"/>
-                </a:solidFill>
-              </a:defRPr>
-            </a:pPr>
-            <a:r>
-              <a:rPr dirty="0"/>
-              <a:t>• Gradient Boost: Lower Burnout F1 (0.681) despite best overall</a:t>
-            </a:r>
-          </a:p>
-          <a:p>
-            <a:pPr>
-              <a:spcAft>
-                <a:spcPts val="800"/>
-              </a:spcAft>
-              <a:defRPr sz="1300">
-                <a:solidFill>
-                  <a:srgbClr val="333333"/>
-                </a:solidFill>
-              </a:defRPr>
-            </a:pPr>
-            <a:r>
-              <a:rPr dirty="0"/>
-              <a:t>• Random Forest: Poor Burnout F1 (0.624) — misses half!</a:t>
-            </a:r>
-          </a:p>
-          <a:p>
-            <a:pPr>
-              <a:spcAft>
-                <a:spcPts val="800"/>
-              </a:spcAft>
-              <a:defRPr sz="1300">
-                <a:solidFill>
-                  <a:srgbClr val="333333"/>
-                </a:solidFill>
-              </a:defRPr>
-            </a:pPr>
-            <a:r>
-              <a:rPr dirty="0"/>
-              <a:t>• Decision Tree: Worst across both classes (0.524)</a:t>
-            </a:r>
-          </a:p>
-          <a:p>
-            <a:pPr>
-              <a:spcAft>
-                <a:spcPts val="800"/>
-              </a:spcAft>
-              <a:defRPr sz="1300">
-                <a:solidFill>
-                  <a:srgbClr val="333333"/>
-                </a:solidFill>
-              </a:defRPr>
-            </a:pPr>
-            <a:endParaRPr dirty="0"/>
-          </a:p>
-          <a:p>
-            <a:pPr>
-              <a:spcAft>
-                <a:spcPts val="800"/>
-              </a:spcAft>
-              <a:defRPr sz="1300">
-                <a:solidFill>
-                  <a:srgbClr val="333333"/>
-                </a:solidFill>
-              </a:defRPr>
-            </a:pPr>
-            <a:r>
-              <a:rPr dirty="0"/>
-              <a:t>⚠️ ANOMALY: Gradient Boost ranks #1 in weighted metrics</a:t>
-            </a:r>
-          </a:p>
-          <a:p>
-            <a:pPr>
-              <a:spcAft>
-                <a:spcPts val="800"/>
-              </a:spcAft>
-              <a:defRPr sz="1300">
-                <a:solidFill>
-                  <a:srgbClr val="333333"/>
-                </a:solidFill>
-              </a:defRPr>
-            </a:pPr>
-            <a:r>
-              <a:rPr dirty="0"/>
-              <a:t>but #3 in minority class detection. The high No-Burnout F1</a:t>
-            </a:r>
-          </a:p>
-          <a:p>
-            <a:pPr>
-              <a:spcAft>
-                <a:spcPts val="800"/>
-              </a:spcAft>
-              <a:defRPr sz="1300">
-                <a:solidFill>
-                  <a:srgbClr val="333333"/>
-                </a:solidFill>
-              </a:defRPr>
-            </a:pPr>
-            <a:r>
-              <a:rPr dirty="0"/>
-              <a:t>(0.888) inflates its weighted average.</a:t>
-            </a:r>
-          </a:p>
-          <a:p>
-            <a:pPr>
-              <a:spcAft>
-                <a:spcPts val="800"/>
-              </a:spcAft>
-              <a:defRPr sz="1300">
-                <a:solidFill>
-                  <a:srgbClr val="333333"/>
-                </a:solidFill>
-              </a:defRPr>
-            </a:pPr>
-            <a:endParaRPr dirty="0"/>
-          </a:p>
-          <a:p>
-            <a:pPr>
-              <a:spcAft>
-                <a:spcPts val="800"/>
-              </a:spcAft>
-              <a:defRPr sz="1300">
-                <a:solidFill>
-                  <a:srgbClr val="333333"/>
-                </a:solidFill>
-              </a:defRPr>
-            </a:pPr>
-            <a:r>
-              <a:rPr dirty="0"/>
-              <a:t>Takeaway: For HR intervention, SVM-RBF is the better choice.</a:t>
+              <a:t>For HR: Better to flag &amp; check unnecessarily than miss burnout.</a:t>
             </a:r>
           </a:p>
         </p:txBody>
@@ -6263,7 +5136,7 @@
 </p:sld>
 </file>
 
-<file path=ppt/slides/slide7.xml><?xml version="1.0" encoding="utf-8"?>
+<file path=ppt/slides/slide4.xml><?xml version="1.0" encoding="utf-8"?>
 <p:sld xmlns:a="http://schemas.openxmlformats.org/drawingml/2006/main" xmlns:r="http://schemas.openxmlformats.org/officeDocument/2006/relationships" xmlns:p="http://schemas.openxmlformats.org/presentationml/2006/main">
   <p:cSld>
     <p:spTree>
@@ -6310,7 +5183,7 @@
               </a:defRPr>
             </a:pPr>
             <a:r>
-              <a:t>Minority Class Focus — Burnout Detection</a:t>
+              <a:t>ROC Curves — Discrimination Ability</a:t>
             </a:r>
           </a:p>
         </p:txBody>
@@ -6324,7 +5197,7 @@
         <p:spPr>
           <a:xfrm>
             <a:off x="457200" y="1188720"/>
-            <a:ext cx="10972800" cy="5029200"/>
+            <a:ext cx="5029200" cy="3924151"/>
           </a:xfrm>
           <a:prstGeom prst="rect">
             <a:avLst/>
@@ -6339,25 +5212,105 @@
           <a:p>
             <a:pPr>
               <a:spcAft>
-                <a:spcPts val="1000"/>
-              </a:spcAft>
-              <a:defRPr sz="1500">
-                <a:solidFill>
-                  <a:srgbClr val="333333"/>
-                </a:solidFill>
-              </a:defRPr>
-            </a:pPr>
-            <a:r>
-              <a:rPr dirty="0"/>
-              <a:t>The question is: 'Can the model FIND burned-out employees?'</a:t>
-            </a:r>
-          </a:p>
-          <a:p>
-            <a:pPr>
-              <a:spcAft>
-                <a:spcPts val="1000"/>
-              </a:spcAft>
-              <a:defRPr sz="1500">
+                <a:spcPts val="800"/>
+              </a:spcAft>
+              <a:defRPr sz="1300">
+                <a:solidFill>
+                  <a:srgbClr val="333333"/>
+                </a:solidFill>
+              </a:defRPr>
+            </a:pPr>
+            <a:r>
+              <a:rPr dirty="0"/>
+              <a:t>AUC Rankings:</a:t>
+            </a:r>
+          </a:p>
+          <a:p>
+            <a:pPr>
+              <a:spcAft>
+                <a:spcPts val="800"/>
+              </a:spcAft>
+              <a:defRPr sz="1300">
+                <a:solidFill>
+                  <a:srgbClr val="333333"/>
+                </a:solidFill>
+              </a:defRPr>
+            </a:pPr>
+            <a:r>
+              <a:rPr dirty="0"/>
+              <a:t>  1. SVM-RBF: 0.913</a:t>
+            </a:r>
+          </a:p>
+          <a:p>
+            <a:pPr>
+              <a:spcAft>
+                <a:spcPts val="800"/>
+              </a:spcAft>
+              <a:defRPr sz="1300">
+                <a:solidFill>
+                  <a:srgbClr val="333333"/>
+                </a:solidFill>
+              </a:defRPr>
+            </a:pPr>
+            <a:r>
+              <a:rPr dirty="0"/>
+              <a:t>  2. Logistic Reg: 0.913</a:t>
+            </a:r>
+          </a:p>
+          <a:p>
+            <a:pPr>
+              <a:spcAft>
+                <a:spcPts val="800"/>
+              </a:spcAft>
+              <a:defRPr sz="1300">
+                <a:solidFill>
+                  <a:srgbClr val="333333"/>
+                </a:solidFill>
+              </a:defRPr>
+            </a:pPr>
+            <a:r>
+              <a:rPr dirty="0"/>
+              <a:t>  3. Random Forest: 0.911</a:t>
+            </a:r>
+          </a:p>
+          <a:p>
+            <a:pPr>
+              <a:spcAft>
+                <a:spcPts val="800"/>
+              </a:spcAft>
+              <a:defRPr sz="1300">
+                <a:solidFill>
+                  <a:srgbClr val="333333"/>
+                </a:solidFill>
+              </a:defRPr>
+            </a:pPr>
+            <a:r>
+              <a:rPr dirty="0"/>
+              <a:t>  4. Gradient Boost: 0.902</a:t>
+            </a:r>
+          </a:p>
+          <a:p>
+            <a:pPr>
+              <a:spcAft>
+                <a:spcPts val="800"/>
+              </a:spcAft>
+              <a:defRPr sz="1300">
+                <a:solidFill>
+                  <a:srgbClr val="333333"/>
+                </a:solidFill>
+              </a:defRPr>
+            </a:pPr>
+            <a:r>
+              <a:rPr dirty="0"/>
+              <a:t>  5. Decision Tree: 0.678</a:t>
+            </a:r>
+          </a:p>
+          <a:p>
+            <a:pPr>
+              <a:spcAft>
+                <a:spcPts val="800"/>
+              </a:spcAft>
+              <a:defRPr sz="1300">
                 <a:solidFill>
                   <a:srgbClr val="333333"/>
                 </a:solidFill>
@@ -6368,121 +5321,57 @@
           <a:p>
             <a:pPr>
               <a:spcAft>
-                <a:spcPts val="1000"/>
-              </a:spcAft>
-              <a:defRPr sz="1500">
-                <a:solidFill>
-                  <a:srgbClr val="333333"/>
-                </a:solidFill>
-              </a:defRPr>
-            </a:pPr>
-            <a:r>
-              <a:rPr dirty="0"/>
-              <a:t>Model           | Precision | Recall  | F1</a:t>
-            </a:r>
-          </a:p>
-          <a:p>
-            <a:pPr>
-              <a:spcAft>
-                <a:spcPts val="1000"/>
-              </a:spcAft>
-              <a:defRPr sz="1500">
-                <a:solidFill>
-                  <a:srgbClr val="333333"/>
-                </a:solidFill>
-              </a:defRPr>
-            </a:pPr>
-            <a:r>
-              <a:rPr dirty="0"/>
-              <a:t>—————————————————————————————————————————————</a:t>
-            </a:r>
-          </a:p>
-          <a:p>
-            <a:pPr>
-              <a:spcAft>
-                <a:spcPts val="1000"/>
-              </a:spcAft>
-              <a:defRPr sz="1500">
-                <a:solidFill>
-                  <a:srgbClr val="333333"/>
-                </a:solidFill>
-              </a:defRPr>
-            </a:pPr>
-            <a:r>
-              <a:rPr dirty="0"/>
-              <a:t>SVM-RBF         |   0.635   |  0.846  | 0.725  ← BEST RECALL</a:t>
-            </a:r>
-          </a:p>
-          <a:p>
-            <a:pPr>
-              <a:spcAft>
-                <a:spcPts val="1000"/>
-              </a:spcAft>
-              <a:defRPr sz="1500">
-                <a:solidFill>
-                  <a:srgbClr val="333333"/>
-                </a:solidFill>
-              </a:defRPr>
-            </a:pPr>
-            <a:r>
-              <a:rPr dirty="0"/>
-              <a:t>Logistic Reg    |   0.640   |  0.821  | 0.719</a:t>
-            </a:r>
-          </a:p>
-          <a:p>
-            <a:pPr>
-              <a:spcAft>
-                <a:spcPts val="1000"/>
-              </a:spcAft>
-              <a:defRPr sz="1500">
-                <a:solidFill>
-                  <a:srgbClr val="333333"/>
-                </a:solidFill>
-              </a:defRPr>
-            </a:pPr>
-            <a:r>
-              <a:rPr dirty="0"/>
-              <a:t>Gradient Boost  |   0.742   |  0.628  | 0.681</a:t>
-            </a:r>
-          </a:p>
-          <a:p>
-            <a:pPr>
-              <a:spcAft>
-                <a:spcPts val="1000"/>
-              </a:spcAft>
-              <a:defRPr sz="1500">
-                <a:solidFill>
-                  <a:srgbClr val="333333"/>
-                </a:solidFill>
-              </a:defRPr>
-            </a:pPr>
-            <a:r>
-              <a:rPr dirty="0"/>
-              <a:t>Random Forest   |   0.830   |  0.500  | 0.624</a:t>
-            </a:r>
-          </a:p>
-          <a:p>
-            <a:pPr>
-              <a:spcAft>
-                <a:spcPts val="1000"/>
-              </a:spcAft>
-              <a:defRPr sz="1500">
-                <a:solidFill>
-                  <a:srgbClr val="333333"/>
-                </a:solidFill>
-              </a:defRPr>
-            </a:pPr>
-            <a:r>
-              <a:rPr dirty="0"/>
-              <a:t>Decision Tree   |   0.567   |  0.487  | 0.524</a:t>
-            </a:r>
-          </a:p>
-          <a:p>
-            <a:pPr>
-              <a:spcAft>
-                <a:spcPts val="1000"/>
-              </a:spcAft>
-              <a:defRPr sz="1500">
+                <a:spcPts val="800"/>
+              </a:spcAft>
+              <a:defRPr sz="1300">
+                <a:solidFill>
+                  <a:srgbClr val="333333"/>
+                </a:solidFill>
+              </a:defRPr>
+            </a:pPr>
+            <a:r>
+              <a:rPr dirty="0"/>
+              <a:t>Thought process:</a:t>
+            </a:r>
+          </a:p>
+          <a:p>
+            <a:pPr>
+              <a:spcAft>
+                <a:spcPts val="800"/>
+              </a:spcAft>
+              <a:defRPr sz="1300">
+                <a:solidFill>
+                  <a:srgbClr val="333333"/>
+                </a:solidFill>
+              </a:defRPr>
+            </a:pPr>
+            <a:r>
+              <a:rPr dirty="0"/>
+              <a:t>• AUC &gt; 0.9 for top 4 models — strong discrimination</a:t>
+            </a:r>
+          </a:p>
+          <a:p>
+            <a:pPr>
+              <a:spcAft>
+                <a:spcPts val="800"/>
+              </a:spcAft>
+              <a:defRPr sz="1300">
+                <a:solidFill>
+                  <a:srgbClr val="333333"/>
+                </a:solidFill>
+              </a:defRPr>
+            </a:pPr>
+            <a:r>
+              <a:rPr dirty="0"/>
+              <a:t>• Decision Tree AUC ~0.68 — barely better than random</a:t>
+            </a:r>
+          </a:p>
+          <a:p>
+            <a:pPr>
+              <a:spcAft>
+                <a:spcPts val="800"/>
+              </a:spcAft>
+              <a:defRPr sz="1300">
                 <a:solidFill>
                   <a:srgbClr val="333333"/>
                 </a:solidFill>
@@ -6493,166 +5382,6 @@
           <a:p>
             <a:pPr>
               <a:spcAft>
-                <a:spcPts val="1000"/>
-              </a:spcAft>
-              <a:defRPr sz="1500">
-                <a:solidFill>
-                  <a:srgbClr val="333333"/>
-                </a:solidFill>
-              </a:defRPr>
-            </a:pPr>
-            <a:r>
-              <a:rPr dirty="0"/>
-              <a:t>Key trade-off:</a:t>
-            </a:r>
-          </a:p>
-          <a:p>
-            <a:pPr>
-              <a:spcAft>
-                <a:spcPts val="1000"/>
-              </a:spcAft>
-              <a:defRPr sz="1500">
-                <a:solidFill>
-                  <a:srgbClr val="333333"/>
-                </a:solidFill>
-              </a:defRPr>
-            </a:pPr>
-            <a:r>
-              <a:rPr dirty="0"/>
-              <a:t>• SVM-RBF catches 85% of burnout (Recall=0.846) but has more false alarms</a:t>
-            </a:r>
-          </a:p>
-          <a:p>
-            <a:pPr>
-              <a:spcAft>
-                <a:spcPts val="1000"/>
-              </a:spcAft>
-              <a:defRPr sz="1500">
-                <a:solidFill>
-                  <a:srgbClr val="333333"/>
-                </a:solidFill>
-              </a:defRPr>
-            </a:pPr>
-            <a:r>
-              <a:rPr dirty="0"/>
-              <a:t>• Random Forest is precise (0.830) but only catches HALF the cases</a:t>
-            </a:r>
-          </a:p>
-          <a:p>
-            <a:pPr>
-              <a:spcAft>
-                <a:spcPts val="1000"/>
-              </a:spcAft>
-              <a:defRPr sz="1500">
-                <a:solidFill>
-                  <a:srgbClr val="333333"/>
-                </a:solidFill>
-              </a:defRPr>
-            </a:pPr>
-            <a:endParaRPr dirty="0"/>
-          </a:p>
-          <a:p>
-            <a:pPr>
-              <a:spcAft>
-                <a:spcPts val="1000"/>
-              </a:spcAft>
-              <a:defRPr sz="1500">
-                <a:solidFill>
-                  <a:srgbClr val="333333"/>
-                </a:solidFill>
-              </a:defRPr>
-            </a:pPr>
-            <a:r>
-              <a:rPr dirty="0"/>
-              <a:t>For HR: Better to flag &amp; check someone unnecessarily than miss burnout.</a:t>
-            </a:r>
-          </a:p>
-        </p:txBody>
-      </p:sp>
-    </p:spTree>
-  </p:cSld>
-  <p:clrMapOvr>
-    <a:masterClrMapping/>
-  </p:clrMapOvr>
-</p:sld>
-</file>
-
-<file path=ppt/slides/slide8.xml><?xml version="1.0" encoding="utf-8"?>
-<p:sld xmlns:a="http://schemas.openxmlformats.org/drawingml/2006/main" xmlns:r="http://schemas.openxmlformats.org/officeDocument/2006/relationships" xmlns:p="http://schemas.openxmlformats.org/presentationml/2006/main">
-  <p:cSld>
-    <p:spTree>
-      <p:nvGrpSpPr>
-        <p:cNvPr id="1" name=""/>
-        <p:cNvGrpSpPr/>
-        <p:nvPr/>
-      </p:nvGrpSpPr>
-      <p:grpSpPr>
-        <a:xfrm>
-          <a:off x="0" y="0"/>
-          <a:ext cx="0" cy="0"/>
-          <a:chOff x="0" y="0"/>
-          <a:chExt cx="0" cy="0"/>
-        </a:xfrm>
-      </p:grpSpPr>
-      <p:sp>
-        <p:nvSpPr>
-          <p:cNvPr id="2" name="TextBox 1"/>
-          <p:cNvSpPr txBox="1"/>
-          <p:nvPr/>
-        </p:nvSpPr>
-        <p:spPr>
-          <a:xfrm>
-            <a:off x="457200" y="274320"/>
-            <a:ext cx="10972800" cy="731520"/>
-          </a:xfrm>
-          <a:prstGeom prst="rect">
-            <a:avLst/>
-          </a:prstGeom>
-          <a:noFill/>
-        </p:spPr>
-        <p:txBody>
-          <a:bodyPr wrap="none">
-            <a:spAutoFit/>
-          </a:bodyPr>
-          <a:lstStyle/>
-          <a:p>
-            <a:pPr>
-              <a:defRPr sz="2400" b="1">
-                <a:solidFill>
-                  <a:srgbClr val="1B2A4A"/>
-                </a:solidFill>
-              </a:defRPr>
-            </a:pPr>
-            <a:r>
-              <a:t>ROC Curves — Discrimination Ability</a:t>
-            </a:r>
-          </a:p>
-        </p:txBody>
-      </p:sp>
-      <p:sp>
-        <p:nvSpPr>
-          <p:cNvPr id="3" name="TextBox 2"/>
-          <p:cNvSpPr txBox="1"/>
-          <p:nvPr/>
-        </p:nvSpPr>
-        <p:spPr>
-          <a:xfrm>
-            <a:off x="457200" y="1188720"/>
-            <a:ext cx="5029200" cy="4832092"/>
-          </a:xfrm>
-          <a:prstGeom prst="rect">
-            <a:avLst/>
-          </a:prstGeom>
-          <a:noFill/>
-        </p:spPr>
-        <p:txBody>
-          <a:bodyPr wrap="square">
-            <a:spAutoFit/>
-          </a:bodyPr>
-          <a:lstStyle/>
-          <a:p>
-            <a:pPr>
-              <a:spcAft>
                 <a:spcPts val="800"/>
               </a:spcAft>
               <a:defRPr sz="1300">
@@ -6663,7 +5392,7 @@
             </a:pPr>
             <a:r>
               <a:rPr dirty="0"/>
-              <a:t>AUC measures how well a model separates the two classes</a:t>
+              <a:t>⚠️ ANOMALY: Decision Tree performs far worse than others.</a:t>
             </a:r>
           </a:p>
           <a:p>
@@ -6679,228 +5408,8 @@
             </a:pPr>
             <a:r>
               <a:rPr dirty="0"/>
-              <a:t>across ALL decision thresholds (not just the default 0.5).</a:t>
-            </a:r>
-          </a:p>
-          <a:p>
-            <a:pPr>
-              <a:spcAft>
-                <a:spcPts val="800"/>
-              </a:spcAft>
-              <a:defRPr sz="1300">
-                <a:solidFill>
-                  <a:srgbClr val="333333"/>
-                </a:solidFill>
-              </a:defRPr>
-            </a:pPr>
-            <a:endParaRPr dirty="0"/>
-          </a:p>
-          <a:p>
-            <a:pPr>
-              <a:spcAft>
-                <a:spcPts val="800"/>
-              </a:spcAft>
-              <a:defRPr sz="1300">
-                <a:solidFill>
-                  <a:srgbClr val="333333"/>
-                </a:solidFill>
-              </a:defRPr>
-            </a:pPr>
-            <a:r>
-              <a:rPr dirty="0"/>
-              <a:t>AUC Rankings:</a:t>
-            </a:r>
-          </a:p>
-          <a:p>
-            <a:pPr>
-              <a:spcAft>
-                <a:spcPts val="800"/>
-              </a:spcAft>
-              <a:defRPr sz="1300">
-                <a:solidFill>
-                  <a:srgbClr val="333333"/>
-                </a:solidFill>
-              </a:defRPr>
-            </a:pPr>
-            <a:r>
-              <a:rPr dirty="0"/>
-              <a:t>  1. SVM-RBF: 0.913</a:t>
-            </a:r>
-          </a:p>
-          <a:p>
-            <a:pPr>
-              <a:spcAft>
-                <a:spcPts val="800"/>
-              </a:spcAft>
-              <a:defRPr sz="1300">
-                <a:solidFill>
-                  <a:srgbClr val="333333"/>
-                </a:solidFill>
-              </a:defRPr>
-            </a:pPr>
-            <a:r>
-              <a:rPr dirty="0"/>
-              <a:t>  2. Logistic Reg: 0.913</a:t>
-            </a:r>
-          </a:p>
-          <a:p>
-            <a:pPr>
-              <a:spcAft>
-                <a:spcPts val="800"/>
-              </a:spcAft>
-              <a:defRPr sz="1300">
-                <a:solidFill>
-                  <a:srgbClr val="333333"/>
-                </a:solidFill>
-              </a:defRPr>
-            </a:pPr>
-            <a:r>
-              <a:rPr dirty="0"/>
-              <a:t>  3. Random Forest: 0.911</a:t>
-            </a:r>
-          </a:p>
-          <a:p>
-            <a:pPr>
-              <a:spcAft>
-                <a:spcPts val="800"/>
-              </a:spcAft>
-              <a:defRPr sz="1300">
-                <a:solidFill>
-                  <a:srgbClr val="333333"/>
-                </a:solidFill>
-              </a:defRPr>
-            </a:pPr>
-            <a:r>
-              <a:rPr dirty="0"/>
-              <a:t>  4. Gradient Boost: 0.902</a:t>
-            </a:r>
-          </a:p>
-          <a:p>
-            <a:pPr>
-              <a:spcAft>
-                <a:spcPts val="800"/>
-              </a:spcAft>
-              <a:defRPr sz="1300">
-                <a:solidFill>
-                  <a:srgbClr val="333333"/>
-                </a:solidFill>
-              </a:defRPr>
-            </a:pPr>
-            <a:r>
-              <a:rPr dirty="0"/>
-              <a:t>  5. Decision Tree: 0.678</a:t>
-            </a:r>
-          </a:p>
-          <a:p>
-            <a:pPr>
-              <a:spcAft>
-                <a:spcPts val="800"/>
-              </a:spcAft>
-              <a:defRPr sz="1300">
-                <a:solidFill>
-                  <a:srgbClr val="333333"/>
-                </a:solidFill>
-              </a:defRPr>
-            </a:pPr>
-            <a:endParaRPr dirty="0"/>
-          </a:p>
-          <a:p>
-            <a:pPr>
-              <a:spcAft>
-                <a:spcPts val="800"/>
-              </a:spcAft>
-              <a:defRPr sz="1300">
-                <a:solidFill>
-                  <a:srgbClr val="333333"/>
-                </a:solidFill>
-              </a:defRPr>
-            </a:pPr>
-            <a:r>
-              <a:rPr dirty="0"/>
-              <a:t>Thought process:</a:t>
-            </a:r>
-          </a:p>
-          <a:p>
-            <a:pPr>
-              <a:spcAft>
-                <a:spcPts val="800"/>
-              </a:spcAft>
-              <a:defRPr sz="1300">
-                <a:solidFill>
-                  <a:srgbClr val="333333"/>
-                </a:solidFill>
-              </a:defRPr>
-            </a:pPr>
-            <a:r>
-              <a:rPr dirty="0"/>
-              <a:t>• AUC &gt; 0.9 for top 4 models — strong discrimination</a:t>
-            </a:r>
-          </a:p>
-          <a:p>
-            <a:pPr>
-              <a:spcAft>
-                <a:spcPts val="800"/>
-              </a:spcAft>
-              <a:defRPr sz="1300">
-                <a:solidFill>
-                  <a:srgbClr val="333333"/>
-                </a:solidFill>
-              </a:defRPr>
-            </a:pPr>
-            <a:r>
-              <a:rPr dirty="0"/>
-              <a:t>• Decision Tree AUC ~0.68 — barely better than random</a:t>
-            </a:r>
-          </a:p>
-          <a:p>
-            <a:pPr>
-              <a:spcAft>
-                <a:spcPts val="800"/>
-              </a:spcAft>
-              <a:defRPr sz="1300">
-                <a:solidFill>
-                  <a:srgbClr val="333333"/>
-                </a:solidFill>
-              </a:defRPr>
-            </a:pPr>
-            <a:endParaRPr dirty="0"/>
-          </a:p>
-          <a:p>
-            <a:pPr>
-              <a:spcAft>
-                <a:spcPts val="800"/>
-              </a:spcAft>
-              <a:defRPr sz="1300">
-                <a:solidFill>
-                  <a:srgbClr val="333333"/>
-                </a:solidFill>
-              </a:defRPr>
-            </a:pPr>
-            <a:r>
-              <a:rPr dirty="0"/>
-              <a:t>⚠️ ANOMALY: Decision Tree performs far worse than others.</a:t>
-            </a:r>
-          </a:p>
-          <a:p>
-            <a:pPr>
-              <a:spcAft>
-                <a:spcPts val="800"/>
-              </a:spcAft>
-              <a:defRPr sz="1300">
-                <a:solidFill>
-                  <a:srgbClr val="333333"/>
-                </a:solidFill>
-              </a:defRPr>
-            </a:pPr>
-            <a:r>
-              <a:rPr dirty="0"/>
               <a:t>Likely overfitting to training data</a:t>
             </a:r>
-            <a:r>
-              <a:rPr lang="en-US" dirty="0"/>
-              <a:t>.</a:t>
-            </a:r>
-            <a:endParaRPr dirty="0"/>
           </a:p>
         </p:txBody>
       </p:sp>
@@ -6936,7 +5445,7 @@
 </p:sld>
 </file>
 
-<file path=ppt/slides/slide9.xml><?xml version="1.0" encoding="utf-8"?>
+<file path=ppt/slides/slide5.xml><?xml version="1.0" encoding="utf-8"?>
 <p:sld xmlns:a="http://schemas.openxmlformats.org/drawingml/2006/main" xmlns:r="http://schemas.openxmlformats.org/officeDocument/2006/relationships" xmlns:p="http://schemas.openxmlformats.org/presentationml/2006/main">
   <p:cSld>
     <p:spTree>
@@ -6997,7 +5506,7 @@
         <p:spPr>
           <a:xfrm>
             <a:off x="457200" y="1188720"/>
-            <a:ext cx="5029200" cy="5029200"/>
+            <a:ext cx="5029200" cy="5134739"/>
           </a:xfrm>
           <a:prstGeom prst="rect">
             <a:avLst/>
@@ -7295,7 +5804,15 @@
             </a:pPr>
             <a:r>
               <a:rPr dirty="0"/>
-              <a:t>Thought process: LASSO used post-hoc for interpretability,</a:t>
+              <a:t>Thought process: LASSO used post-</a:t>
+            </a:r>
+            <a:r>
+              <a:rPr lang="en-US" dirty="0"/>
+              <a:t>fitting</a:t>
+            </a:r>
+            <a:r>
+              <a:rPr dirty="0"/>
+              <a:t> for interpretability,</a:t>
             </a:r>
           </a:p>
           <a:p>
@@ -7340,6 +5857,1080 @@
           </a:prstGeom>
         </p:spPr>
       </p:pic>
+    </p:spTree>
+  </p:cSld>
+  <p:clrMapOvr>
+    <a:masterClrMapping/>
+  </p:clrMapOvr>
+</p:sld>
+</file>
+
+<file path=ppt/slides/slide6.xml><?xml version="1.0" encoding="utf-8"?>
+<p:sld xmlns:a="http://schemas.openxmlformats.org/drawingml/2006/main" xmlns:r="http://schemas.openxmlformats.org/officeDocument/2006/relationships" xmlns:p="http://schemas.openxmlformats.org/presentationml/2006/main">
+  <p:cSld>
+    <p:spTree>
+      <p:nvGrpSpPr>
+        <p:cNvPr id="1" name=""/>
+        <p:cNvGrpSpPr/>
+        <p:nvPr/>
+      </p:nvGrpSpPr>
+      <p:grpSpPr>
+        <a:xfrm>
+          <a:off x="0" y="0"/>
+          <a:ext cx="0" cy="0"/>
+          <a:chOff x="0" y="0"/>
+          <a:chExt cx="0" cy="0"/>
+        </a:xfrm>
+      </p:grpSpPr>
+      <p:sp>
+        <p:nvSpPr>
+          <p:cNvPr id="2" name="TextBox 1"/>
+          <p:cNvSpPr txBox="1"/>
+          <p:nvPr/>
+        </p:nvSpPr>
+        <p:spPr>
+          <a:xfrm>
+            <a:off x="457200" y="274320"/>
+            <a:ext cx="10972800" cy="731520"/>
+          </a:xfrm>
+          <a:prstGeom prst="rect">
+            <a:avLst/>
+          </a:prstGeom>
+          <a:noFill/>
+        </p:spPr>
+        <p:txBody>
+          <a:bodyPr wrap="none">
+            <a:spAutoFit/>
+          </a:bodyPr>
+          <a:lstStyle/>
+          <a:p>
+            <a:pPr>
+              <a:defRPr sz="2400" b="1">
+                <a:solidFill>
+                  <a:srgbClr val="1B2A4A"/>
+                </a:solidFill>
+              </a:defRPr>
+            </a:pPr>
+            <a:r>
+              <a:t>Overfitting Analysis — SVM-RBF vs Logistic Regression</a:t>
+            </a:r>
+          </a:p>
+        </p:txBody>
+      </p:sp>
+      <p:sp>
+        <p:nvSpPr>
+          <p:cNvPr id="3" name="TextBox 2"/>
+          <p:cNvSpPr txBox="1"/>
+          <p:nvPr/>
+        </p:nvSpPr>
+        <p:spPr>
+          <a:xfrm>
+            <a:off x="457200" y="1188720"/>
+            <a:ext cx="5029200" cy="4832092"/>
+          </a:xfrm>
+          <a:prstGeom prst="rect">
+            <a:avLst/>
+          </a:prstGeom>
+          <a:noFill/>
+        </p:spPr>
+        <p:txBody>
+          <a:bodyPr wrap="square">
+            <a:spAutoFit/>
+          </a:bodyPr>
+          <a:lstStyle/>
+          <a:p>
+            <a:pPr>
+              <a:spcAft>
+                <a:spcPts val="800"/>
+              </a:spcAft>
+              <a:defRPr sz="1300">
+                <a:solidFill>
+                  <a:srgbClr val="333333"/>
+                </a:solidFill>
+              </a:defRPr>
+            </a:pPr>
+            <a:r>
+              <a:rPr dirty="0"/>
+              <a:t>Learning curves reveal generalization quality:</a:t>
+            </a:r>
+          </a:p>
+          <a:p>
+            <a:pPr>
+              <a:spcAft>
+                <a:spcPts val="800"/>
+              </a:spcAft>
+              <a:defRPr sz="1300">
+                <a:solidFill>
+                  <a:srgbClr val="333333"/>
+                </a:solidFill>
+              </a:defRPr>
+            </a:pPr>
+            <a:endParaRPr dirty="0"/>
+          </a:p>
+          <a:p>
+            <a:pPr>
+              <a:spcAft>
+                <a:spcPts val="800"/>
+              </a:spcAft>
+              <a:defRPr sz="1300">
+                <a:solidFill>
+                  <a:srgbClr val="333333"/>
+                </a:solidFill>
+              </a:defRPr>
+            </a:pPr>
+            <a:r>
+              <a:rPr dirty="0"/>
+              <a:t>Metric               | SVM-RBF    | Logistic Reg</a:t>
+            </a:r>
+          </a:p>
+          <a:p>
+            <a:pPr>
+              <a:spcAft>
+                <a:spcPts val="800"/>
+              </a:spcAft>
+              <a:defRPr sz="1300">
+                <a:solidFill>
+                  <a:srgbClr val="333333"/>
+                </a:solidFill>
+              </a:defRPr>
+            </a:pPr>
+            <a:r>
+              <a:rPr dirty="0"/>
+              <a:t>———————————————————</a:t>
+            </a:r>
+          </a:p>
+          <a:p>
+            <a:pPr>
+              <a:spcAft>
+                <a:spcPts val="800"/>
+              </a:spcAft>
+              <a:defRPr sz="1300">
+                <a:solidFill>
+                  <a:srgbClr val="333333"/>
+                </a:solidFill>
+              </a:defRPr>
+            </a:pPr>
+            <a:r>
+              <a:rPr dirty="0"/>
+              <a:t>Training F1          | ~0.95      | ~0.85</a:t>
+            </a:r>
+          </a:p>
+          <a:p>
+            <a:pPr>
+              <a:spcAft>
+                <a:spcPts val="800"/>
+              </a:spcAft>
+              <a:defRPr sz="1300">
+                <a:solidFill>
+                  <a:srgbClr val="333333"/>
+                </a:solidFill>
+              </a:defRPr>
+            </a:pPr>
+            <a:r>
+              <a:rPr dirty="0"/>
+              <a:t>Cross-Val F1         | ~0.82      | ~0.82</a:t>
+            </a:r>
+          </a:p>
+          <a:p>
+            <a:pPr>
+              <a:spcAft>
+                <a:spcPts val="800"/>
+              </a:spcAft>
+              <a:defRPr sz="1300">
+                <a:solidFill>
+                  <a:srgbClr val="333333"/>
+                </a:solidFill>
+              </a:defRPr>
+            </a:pPr>
+            <a:r>
+              <a:rPr dirty="0"/>
+              <a:t>Overfit Gap          | ~0.12 ⚠️   | ~0.03 ✅</a:t>
+            </a:r>
+          </a:p>
+          <a:p>
+            <a:pPr>
+              <a:spcAft>
+                <a:spcPts val="800"/>
+              </a:spcAft>
+              <a:defRPr sz="1300">
+                <a:solidFill>
+                  <a:srgbClr val="333333"/>
+                </a:solidFill>
+              </a:defRPr>
+            </a:pPr>
+            <a:endParaRPr dirty="0"/>
+          </a:p>
+          <a:p>
+            <a:pPr>
+              <a:spcAft>
+                <a:spcPts val="800"/>
+              </a:spcAft>
+              <a:defRPr sz="1300">
+                <a:solidFill>
+                  <a:srgbClr val="333333"/>
+                </a:solidFill>
+              </a:defRPr>
+            </a:pPr>
+            <a:r>
+              <a:rPr dirty="0"/>
+              <a:t>Key insight:</a:t>
+            </a:r>
+          </a:p>
+          <a:p>
+            <a:pPr>
+              <a:spcAft>
+                <a:spcPts val="800"/>
+              </a:spcAft>
+              <a:defRPr sz="1300">
+                <a:solidFill>
+                  <a:srgbClr val="333333"/>
+                </a:solidFill>
+              </a:defRPr>
+            </a:pPr>
+            <a:r>
+              <a:rPr dirty="0"/>
+              <a:t>• Both achieve SAME CV F1 (~0.82)</a:t>
+            </a:r>
+          </a:p>
+          <a:p>
+            <a:pPr>
+              <a:spcAft>
+                <a:spcPts val="800"/>
+              </a:spcAft>
+              <a:defRPr sz="1300">
+                <a:solidFill>
+                  <a:srgbClr val="333333"/>
+                </a:solidFill>
+              </a:defRPr>
+            </a:pPr>
+            <a:r>
+              <a:rPr dirty="0"/>
+              <a:t>• SVM-RBF memorizes training data (Train=0.95)</a:t>
+            </a:r>
+          </a:p>
+          <a:p>
+            <a:pPr>
+              <a:spcAft>
+                <a:spcPts val="800"/>
+              </a:spcAft>
+              <a:defRPr sz="1300">
+                <a:solidFill>
+                  <a:srgbClr val="333333"/>
+                </a:solidFill>
+              </a:defRPr>
+            </a:pPr>
+            <a:r>
+              <a:rPr dirty="0"/>
+              <a:t>• Logistic Reg generalizes honestly</a:t>
+            </a:r>
+            <a:r>
+              <a:rPr lang="en-US" dirty="0"/>
+              <a:t> (Train ≈ CV)</a:t>
+            </a:r>
+          </a:p>
+          <a:p>
+            <a:pPr>
+              <a:spcAft>
+                <a:spcPts val="800"/>
+              </a:spcAft>
+              <a:defRPr sz="1300">
+                <a:solidFill>
+                  <a:srgbClr val="333333"/>
+                </a:solidFill>
+              </a:defRPr>
+            </a:pPr>
+            <a:endParaRPr lang="en-US" dirty="0"/>
+          </a:p>
+          <a:p>
+            <a:pPr>
+              <a:spcAft>
+                <a:spcPts val="800"/>
+              </a:spcAft>
+              <a:defRPr sz="1300">
+                <a:solidFill>
+                  <a:srgbClr val="333333"/>
+                </a:solidFill>
+              </a:defRPr>
+            </a:pPr>
+            <a:r>
+              <a:rPr dirty="0"/>
+              <a:t>Verdict: SVM-RBF's extra complexity adds </a:t>
+            </a:r>
+            <a:r>
+              <a:rPr lang="en-US" dirty="0"/>
+              <a:t>minor </a:t>
+            </a:r>
+            <a:r>
+              <a:rPr dirty="0"/>
+              <a:t>overfitting</a:t>
+            </a:r>
+          </a:p>
+          <a:p>
+            <a:pPr>
+              <a:spcAft>
+                <a:spcPts val="800"/>
+              </a:spcAft>
+              <a:defRPr sz="1300">
+                <a:solidFill>
+                  <a:srgbClr val="333333"/>
+                </a:solidFill>
+              </a:defRPr>
+            </a:pPr>
+            <a:r>
+              <a:rPr dirty="0"/>
+              <a:t>without improving real-world performance.</a:t>
+            </a:r>
+          </a:p>
+          <a:p>
+            <a:pPr>
+              <a:spcAft>
+                <a:spcPts val="800"/>
+              </a:spcAft>
+              <a:defRPr sz="1300">
+                <a:solidFill>
+                  <a:srgbClr val="333333"/>
+                </a:solidFill>
+              </a:defRPr>
+            </a:pPr>
+            <a:r>
+              <a:rPr dirty="0"/>
+              <a:t>Logistic Regression is the more reliable model</a:t>
+            </a:r>
+            <a:r>
+              <a:rPr lang="en-US" dirty="0"/>
+              <a:t> in this case.</a:t>
+            </a:r>
+            <a:endParaRPr dirty="0"/>
+          </a:p>
+        </p:txBody>
+      </p:sp>
+      <p:pic>
+        <p:nvPicPr>
+          <p:cNvPr id="4" name="Picture 3" descr="overfitting_comparison.png"/>
+          <p:cNvPicPr>
+            <a:picLocks noChangeAspect="1"/>
+          </p:cNvPicPr>
+          <p:nvPr/>
+        </p:nvPicPr>
+        <p:blipFill>
+          <a:blip r:embed="rId3"/>
+          <a:stretch>
+            <a:fillRect/>
+          </a:stretch>
+        </p:blipFill>
+        <p:spPr>
+          <a:xfrm>
+            <a:off x="5669280" y="1097280"/>
+            <a:ext cx="6217920" cy="2210417"/>
+          </a:xfrm>
+          <a:prstGeom prst="rect">
+            <a:avLst/>
+          </a:prstGeom>
+        </p:spPr>
+      </p:pic>
+    </p:spTree>
+  </p:cSld>
+  <p:clrMapOvr>
+    <a:masterClrMapping/>
+  </p:clrMapOvr>
+</p:sld>
+</file>
+
+<file path=ppt/slides/slide7.xml><?xml version="1.0" encoding="utf-8"?>
+<p:sld xmlns:a="http://schemas.openxmlformats.org/drawingml/2006/main" xmlns:r="http://schemas.openxmlformats.org/officeDocument/2006/relationships" xmlns:p="http://schemas.openxmlformats.org/presentationml/2006/main">
+  <p:cSld>
+    <p:spTree>
+      <p:nvGrpSpPr>
+        <p:cNvPr id="1" name=""/>
+        <p:cNvGrpSpPr/>
+        <p:nvPr/>
+      </p:nvGrpSpPr>
+      <p:grpSpPr>
+        <a:xfrm>
+          <a:off x="0" y="0"/>
+          <a:ext cx="0" cy="0"/>
+          <a:chOff x="0" y="0"/>
+          <a:chExt cx="0" cy="0"/>
+        </a:xfrm>
+      </p:grpSpPr>
+      <p:sp>
+        <p:nvSpPr>
+          <p:cNvPr id="2" name="TextBox 1"/>
+          <p:cNvSpPr txBox="1"/>
+          <p:nvPr/>
+        </p:nvSpPr>
+        <p:spPr>
+          <a:xfrm>
+            <a:off x="457200" y="274320"/>
+            <a:ext cx="10972800" cy="731520"/>
+          </a:xfrm>
+          <a:prstGeom prst="rect">
+            <a:avLst/>
+          </a:prstGeom>
+          <a:noFill/>
+        </p:spPr>
+        <p:txBody>
+          <a:bodyPr wrap="none">
+            <a:spAutoFit/>
+          </a:bodyPr>
+          <a:lstStyle/>
+          <a:p>
+            <a:pPr>
+              <a:defRPr sz="2400" b="1">
+                <a:solidFill>
+                  <a:srgbClr val="1B2A4A"/>
+                </a:solidFill>
+              </a:defRPr>
+            </a:pPr>
+            <a:r>
+              <a:t>Anomalies &amp; Pitfalls Identified</a:t>
+            </a:r>
+          </a:p>
+        </p:txBody>
+      </p:sp>
+      <p:sp>
+        <p:nvSpPr>
+          <p:cNvPr id="3" name="TextBox 2"/>
+          <p:cNvSpPr txBox="1"/>
+          <p:nvPr/>
+        </p:nvSpPr>
+        <p:spPr>
+          <a:xfrm>
+            <a:off x="457200" y="829491"/>
+            <a:ext cx="10972800" cy="5709255"/>
+          </a:xfrm>
+          <a:prstGeom prst="rect">
+            <a:avLst/>
+          </a:prstGeom>
+          <a:noFill/>
+        </p:spPr>
+        <p:txBody>
+          <a:bodyPr wrap="square">
+            <a:spAutoFit/>
+          </a:bodyPr>
+          <a:lstStyle/>
+          <a:p>
+            <a:pPr>
+              <a:spcAft>
+                <a:spcPts val="1000"/>
+              </a:spcAft>
+              <a:defRPr sz="1500">
+                <a:solidFill>
+                  <a:srgbClr val="333333"/>
+                </a:solidFill>
+              </a:defRPr>
+            </a:pPr>
+            <a:r>
+              <a:rPr dirty="0"/>
+              <a:t>1. WEIGHTED METRIC DECEPTION</a:t>
+            </a:r>
+          </a:p>
+          <a:p>
+            <a:pPr>
+              <a:spcAft>
+                <a:spcPts val="1000"/>
+              </a:spcAft>
+              <a:defRPr sz="1500">
+                <a:solidFill>
+                  <a:srgbClr val="333333"/>
+                </a:solidFill>
+              </a:defRPr>
+            </a:pPr>
+            <a:r>
+              <a:rPr dirty="0"/>
+              <a:t>   Gradient Boost appeared #1 (Weighted F1=0.846) but misses 37%</a:t>
+            </a:r>
+          </a:p>
+          <a:p>
+            <a:pPr>
+              <a:spcAft>
+                <a:spcPts val="1000"/>
+              </a:spcAft>
+              <a:defRPr sz="1500">
+                <a:solidFill>
+                  <a:srgbClr val="333333"/>
+                </a:solidFill>
+              </a:defRPr>
+            </a:pPr>
+            <a:r>
+              <a:rPr dirty="0"/>
+              <a:t>   of burnout cases. The 74% majority class inflates aggregate scores.</a:t>
+            </a:r>
+          </a:p>
+          <a:p>
+            <a:pPr>
+              <a:spcAft>
+                <a:spcPts val="1000"/>
+              </a:spcAft>
+              <a:defRPr sz="1500">
+                <a:solidFill>
+                  <a:srgbClr val="333333"/>
+                </a:solidFill>
+              </a:defRPr>
+            </a:pPr>
+            <a:r>
+              <a:rPr dirty="0"/>
+              <a:t>2. PRECISION-RECALL TRADE-OFF</a:t>
+            </a:r>
+          </a:p>
+          <a:p>
+            <a:pPr>
+              <a:spcAft>
+                <a:spcPts val="1000"/>
+              </a:spcAft>
+              <a:defRPr sz="1500">
+                <a:solidFill>
+                  <a:srgbClr val="333333"/>
+                </a:solidFill>
+              </a:defRPr>
+            </a:pPr>
+            <a:r>
+              <a:rPr dirty="0"/>
+              <a:t>   Random Forest: 83% precision but only 50% recall.</a:t>
+            </a:r>
+          </a:p>
+          <a:p>
+            <a:pPr>
+              <a:spcAft>
+                <a:spcPts val="1000"/>
+              </a:spcAft>
+              <a:defRPr sz="1500">
+                <a:solidFill>
+                  <a:srgbClr val="333333"/>
+                </a:solidFill>
+              </a:defRPr>
+            </a:pPr>
+            <a:r>
+              <a:rPr dirty="0"/>
+              <a:t>   It's very sure when it flags </a:t>
+            </a:r>
+            <a:r>
+              <a:rPr lang="en-US" dirty="0"/>
+              <a:t>someone but</a:t>
+            </a:r>
+            <a:r>
+              <a:rPr dirty="0"/>
+              <a:t> misses half the cases.</a:t>
+            </a:r>
+          </a:p>
+          <a:p>
+            <a:pPr>
+              <a:spcAft>
+                <a:spcPts val="1000"/>
+              </a:spcAft>
+              <a:defRPr sz="1500">
+                <a:solidFill>
+                  <a:srgbClr val="333333"/>
+                </a:solidFill>
+              </a:defRPr>
+            </a:pPr>
+            <a:r>
+              <a:rPr dirty="0"/>
+              <a:t>3. DECISION TREE OVERFITTING</a:t>
+            </a:r>
+          </a:p>
+          <a:p>
+            <a:pPr>
+              <a:spcAft>
+                <a:spcPts val="1000"/>
+              </a:spcAft>
+              <a:defRPr sz="1500">
+                <a:solidFill>
+                  <a:srgbClr val="333333"/>
+                </a:solidFill>
+              </a:defRPr>
+            </a:pPr>
+            <a:r>
+              <a:rPr dirty="0"/>
+              <a:t>   AUC=0.678 — dramatically worse than all other models (&gt;0.9).</a:t>
+            </a:r>
+          </a:p>
+          <a:p>
+            <a:pPr>
+              <a:spcAft>
+                <a:spcPts val="1000"/>
+              </a:spcAft>
+              <a:defRPr sz="1500">
+                <a:solidFill>
+                  <a:srgbClr val="333333"/>
+                </a:solidFill>
+              </a:defRPr>
+            </a:pPr>
+            <a:r>
+              <a:rPr dirty="0"/>
+              <a:t>   Without </a:t>
+            </a:r>
+            <a:r>
+              <a:rPr dirty="0" err="1"/>
+              <a:t>max_depth</a:t>
+            </a:r>
+            <a:r>
+              <a:rPr dirty="0"/>
+              <a:t> pruning, it memorizes training data.</a:t>
+            </a:r>
+          </a:p>
+          <a:p>
+            <a:pPr>
+              <a:spcAft>
+                <a:spcPts val="1000"/>
+              </a:spcAft>
+              <a:defRPr sz="1500">
+                <a:solidFill>
+                  <a:srgbClr val="333333"/>
+                </a:solidFill>
+              </a:defRPr>
+            </a:pPr>
+            <a:r>
+              <a:rPr dirty="0"/>
+              <a:t>4. FEATURE LEAKAGE RISK</a:t>
+            </a:r>
+          </a:p>
+          <a:p>
+            <a:pPr>
+              <a:spcAft>
+                <a:spcPts val="1000"/>
+              </a:spcAft>
+              <a:defRPr sz="1500">
+                <a:solidFill>
+                  <a:srgbClr val="333333"/>
+                </a:solidFill>
+              </a:defRPr>
+            </a:pPr>
+            <a:r>
+              <a:rPr dirty="0"/>
+              <a:t>   </a:t>
+            </a:r>
+            <a:r>
+              <a:rPr dirty="0" err="1"/>
+              <a:t>burnout_score</a:t>
+            </a:r>
+            <a:r>
+              <a:rPr dirty="0"/>
+              <a:t> must be excluded from features (it </a:t>
+            </a:r>
+            <a:r>
+              <a:rPr lang="en-US" dirty="0"/>
+              <a:t>is</a:t>
+            </a:r>
+            <a:r>
+              <a:rPr dirty="0"/>
+              <a:t> the target).</a:t>
+            </a:r>
+          </a:p>
+          <a:p>
+            <a:pPr>
+              <a:spcAft>
+                <a:spcPts val="1000"/>
+              </a:spcAft>
+              <a:defRPr sz="1500">
+                <a:solidFill>
+                  <a:srgbClr val="333333"/>
+                </a:solidFill>
+              </a:defRPr>
+            </a:pPr>
+            <a:r>
+              <a:rPr dirty="0"/>
+              <a:t>   </a:t>
+            </a:r>
+            <a:r>
+              <a:rPr dirty="0" err="1"/>
+              <a:t>attrition_risk</a:t>
+            </a:r>
+            <a:r>
+              <a:rPr dirty="0"/>
+              <a:t> has strong correlation — borderline leakage but</a:t>
+            </a:r>
+          </a:p>
+          <a:p>
+            <a:pPr>
+              <a:spcAft>
+                <a:spcPts val="1000"/>
+              </a:spcAft>
+              <a:defRPr sz="1500">
+                <a:solidFill>
+                  <a:srgbClr val="333333"/>
+                </a:solidFill>
+              </a:defRPr>
+            </a:pPr>
+            <a:r>
+              <a:rPr dirty="0"/>
+              <a:t>   kept because it's independently measured in the dataset.</a:t>
+            </a:r>
+          </a:p>
+          <a:p>
+            <a:pPr>
+              <a:spcAft>
+                <a:spcPts val="1000"/>
+              </a:spcAft>
+              <a:defRPr sz="1500">
+                <a:solidFill>
+                  <a:srgbClr val="333333"/>
+                </a:solidFill>
+              </a:defRPr>
+            </a:pPr>
+            <a:r>
+              <a:rPr dirty="0"/>
+              <a:t>5. THRESHOLD SENSITIVITY</a:t>
+            </a:r>
+          </a:p>
+          <a:p>
+            <a:pPr>
+              <a:spcAft>
+                <a:spcPts val="1000"/>
+              </a:spcAft>
+              <a:defRPr sz="1500">
+                <a:solidFill>
+                  <a:srgbClr val="333333"/>
+                </a:solidFill>
+              </a:defRPr>
+            </a:pPr>
+            <a:r>
+              <a:rPr dirty="0"/>
+              <a:t>   75th percentile threshold is arbitrary. Shifting it changes class</a:t>
+            </a:r>
+          </a:p>
+          <a:p>
+            <a:pPr>
+              <a:spcAft>
+                <a:spcPts val="1000"/>
+              </a:spcAft>
+              <a:defRPr sz="1500">
+                <a:solidFill>
+                  <a:srgbClr val="333333"/>
+                </a:solidFill>
+              </a:defRPr>
+            </a:pPr>
+            <a:r>
+              <a:rPr dirty="0"/>
+              <a:t>   balance and model rankings. Sensitivity analysis recommended.</a:t>
+            </a:r>
+          </a:p>
+        </p:txBody>
+      </p:sp>
+    </p:spTree>
+  </p:cSld>
+  <p:clrMapOvr>
+    <a:masterClrMapping/>
+  </p:clrMapOvr>
+</p:sld>
+</file>
+
+<file path=ppt/slides/slide8.xml><?xml version="1.0" encoding="utf-8"?>
+<p:sld xmlns:a="http://schemas.openxmlformats.org/drawingml/2006/main" xmlns:r="http://schemas.openxmlformats.org/officeDocument/2006/relationships" xmlns:p="http://schemas.openxmlformats.org/presentationml/2006/main">
+  <p:cSld>
+    <p:spTree>
+      <p:nvGrpSpPr>
+        <p:cNvPr id="1" name=""/>
+        <p:cNvGrpSpPr/>
+        <p:nvPr/>
+      </p:nvGrpSpPr>
+      <p:grpSpPr>
+        <a:xfrm>
+          <a:off x="0" y="0"/>
+          <a:ext cx="0" cy="0"/>
+          <a:chOff x="0" y="0"/>
+          <a:chExt cx="0" cy="0"/>
+        </a:xfrm>
+      </p:grpSpPr>
+      <p:sp>
+        <p:nvSpPr>
+          <p:cNvPr id="2" name="TextBox 1"/>
+          <p:cNvSpPr txBox="1"/>
+          <p:nvPr/>
+        </p:nvSpPr>
+        <p:spPr>
+          <a:xfrm>
+            <a:off x="457200" y="274320"/>
+            <a:ext cx="10972800" cy="731520"/>
+          </a:xfrm>
+          <a:prstGeom prst="rect">
+            <a:avLst/>
+          </a:prstGeom>
+          <a:noFill/>
+        </p:spPr>
+        <p:txBody>
+          <a:bodyPr wrap="none">
+            <a:spAutoFit/>
+          </a:bodyPr>
+          <a:lstStyle/>
+          <a:p>
+            <a:pPr>
+              <a:defRPr sz="2400" b="1">
+                <a:solidFill>
+                  <a:srgbClr val="1B2A4A"/>
+                </a:solidFill>
+              </a:defRPr>
+            </a:pPr>
+            <a:r>
+              <a:t>Conclusion &amp; Recommendation</a:t>
+            </a:r>
+          </a:p>
+        </p:txBody>
+      </p:sp>
+      <p:sp>
+        <p:nvSpPr>
+          <p:cNvPr id="3" name="TextBox 2"/>
+          <p:cNvSpPr txBox="1"/>
+          <p:nvPr/>
+        </p:nvSpPr>
+        <p:spPr>
+          <a:xfrm>
+            <a:off x="457200" y="1188720"/>
+            <a:ext cx="10972800" cy="3913892"/>
+          </a:xfrm>
+          <a:prstGeom prst="rect">
+            <a:avLst/>
+          </a:prstGeom>
+          <a:noFill/>
+        </p:spPr>
+        <p:txBody>
+          <a:bodyPr wrap="square">
+            <a:spAutoFit/>
+          </a:bodyPr>
+          <a:lstStyle/>
+          <a:p>
+            <a:pPr>
+              <a:spcAft>
+                <a:spcPts val="1000"/>
+              </a:spcAft>
+              <a:defRPr sz="1500">
+                <a:solidFill>
+                  <a:srgbClr val="333333"/>
+                </a:solidFill>
+              </a:defRPr>
+            </a:pPr>
+            <a:r>
+              <a:rPr dirty="0"/>
+              <a:t>ANSWER: </a:t>
+            </a:r>
+            <a:r>
+              <a:rPr b="1" dirty="0"/>
+              <a:t>Employees most at risk of burnout have:</a:t>
+            </a:r>
+          </a:p>
+          <a:p>
+            <a:pPr>
+              <a:spcAft>
+                <a:spcPts val="1000"/>
+              </a:spcAft>
+              <a:defRPr sz="1500">
+                <a:solidFill>
+                  <a:srgbClr val="333333"/>
+                </a:solidFill>
+              </a:defRPr>
+            </a:pPr>
+            <a:r>
+              <a:rPr sz="1500" dirty="0">
+                <a:solidFill>
+                  <a:srgbClr val="00B050"/>
+                </a:solidFill>
+              </a:rPr>
+              <a:t>  • High AI task replacement percentage (strongest signal)</a:t>
+            </a:r>
+          </a:p>
+          <a:p>
+            <a:pPr>
+              <a:spcAft>
+                <a:spcPts val="1000"/>
+              </a:spcAft>
+              <a:defRPr sz="1500">
+                <a:solidFill>
+                  <a:srgbClr val="333333"/>
+                </a:solidFill>
+              </a:defRPr>
+            </a:pPr>
+            <a:r>
+              <a:rPr sz="1500" dirty="0">
+                <a:solidFill>
+                  <a:srgbClr val="00B050"/>
+                </a:solidFill>
+              </a:rPr>
+              <a:t>  • Long daily AI-assisted work hours</a:t>
+            </a:r>
+          </a:p>
+          <a:p>
+            <a:pPr>
+              <a:spcAft>
+                <a:spcPts val="1000"/>
+              </a:spcAft>
+              <a:defRPr sz="1500">
+                <a:solidFill>
+                  <a:srgbClr val="333333"/>
+                </a:solidFill>
+              </a:defRPr>
+            </a:pPr>
+            <a:r>
+              <a:rPr sz="1500" dirty="0">
+                <a:solidFill>
+                  <a:srgbClr val="00B050"/>
+                </a:solidFill>
+              </a:rPr>
+              <a:t>  • Fear of AI replacement</a:t>
+            </a:r>
+          </a:p>
+          <a:p>
+            <a:pPr>
+              <a:spcAft>
+                <a:spcPts val="1000"/>
+              </a:spcAft>
+              <a:defRPr sz="1500">
+                <a:solidFill>
+                  <a:srgbClr val="333333"/>
+                </a:solidFill>
+              </a:defRPr>
+            </a:pPr>
+            <a:r>
+              <a:rPr sz="1500" dirty="0">
+                <a:solidFill>
+                  <a:srgbClr val="00B050"/>
+                </a:solidFill>
+              </a:rPr>
+              <a:t>  • Work in EdTech, Gaming, or E-commerce industries</a:t>
+            </a:r>
+          </a:p>
+          <a:p>
+            <a:pPr>
+              <a:spcAft>
+                <a:spcPts val="1000"/>
+              </a:spcAft>
+              <a:defRPr sz="1500">
+                <a:solidFill>
+                  <a:srgbClr val="333333"/>
+                </a:solidFill>
+              </a:defRPr>
+            </a:pPr>
+            <a:r>
+              <a:rPr dirty="0"/>
+              <a:t>RECOMMENDED MODEL: </a:t>
+            </a:r>
+            <a:r>
+              <a:rPr sz="1500" b="1" dirty="0">
+                <a:solidFill>
+                  <a:srgbClr val="333333"/>
+                </a:solidFill>
+              </a:rPr>
+              <a:t>Logistic Regression</a:t>
+            </a:r>
+          </a:p>
+          <a:p>
+            <a:pPr>
+              <a:spcAft>
+                <a:spcPts val="1000"/>
+              </a:spcAft>
+              <a:defRPr sz="1500">
+                <a:solidFill>
+                  <a:srgbClr val="333333"/>
+                </a:solidFill>
+              </a:defRPr>
+            </a:pPr>
+            <a:r>
+              <a:rPr dirty="0">
+                <a:solidFill>
+                  <a:srgbClr val="00B050"/>
+                </a:solidFill>
+              </a:rPr>
+              <a:t>  </a:t>
+            </a:r>
+            <a:r>
+              <a:rPr lang="en-US" dirty="0">
+                <a:solidFill>
+                  <a:srgbClr val="00B050"/>
+                </a:solidFill>
+              </a:rPr>
+              <a:t>NEXT STEPS:</a:t>
+            </a:r>
+          </a:p>
+          <a:p>
+            <a:pPr>
+              <a:spcAft>
+                <a:spcPts val="1000"/>
+              </a:spcAft>
+              <a:defRPr sz="1500">
+                <a:solidFill>
+                  <a:srgbClr val="333333"/>
+                </a:solidFill>
+              </a:defRPr>
+            </a:pPr>
+            <a:r>
+              <a:rPr lang="en-US" dirty="0">
+                <a:solidFill>
+                  <a:srgbClr val="00B050"/>
+                </a:solidFill>
+              </a:rPr>
+              <a:t>  • Deploy Logistic Regression — stable, interpretable</a:t>
+            </a:r>
+          </a:p>
+          <a:p>
+            <a:pPr>
+              <a:spcAft>
+                <a:spcPts val="1000"/>
+              </a:spcAft>
+              <a:defRPr sz="1500">
+                <a:solidFill>
+                  <a:srgbClr val="333333"/>
+                </a:solidFill>
+              </a:defRPr>
+            </a:pPr>
+            <a:r>
+              <a:rPr lang="en-US" dirty="0">
+                <a:solidFill>
+                  <a:srgbClr val="00B050"/>
+                </a:solidFill>
+              </a:rPr>
+              <a:t>  • Monitor </a:t>
+            </a:r>
+            <a:r>
+              <a:rPr lang="en-US" dirty="0" err="1">
+                <a:solidFill>
+                  <a:srgbClr val="00B050"/>
+                </a:solidFill>
+              </a:rPr>
+              <a:t>ai_replaces_my_tasks_pct</a:t>
+            </a:r>
+            <a:r>
+              <a:rPr lang="en-US" dirty="0">
+                <a:solidFill>
+                  <a:srgbClr val="00B050"/>
+                </a:solidFill>
+              </a:rPr>
+              <a:t> as early warning indicator</a:t>
+            </a:r>
+          </a:p>
+          <a:p>
+            <a:pPr>
+              <a:spcAft>
+                <a:spcPts val="1000"/>
+              </a:spcAft>
+              <a:defRPr sz="1500">
+                <a:solidFill>
+                  <a:srgbClr val="333333"/>
+                </a:solidFill>
+              </a:defRPr>
+            </a:pPr>
+            <a:r>
+              <a:rPr lang="en-US" dirty="0">
+                <a:solidFill>
+                  <a:srgbClr val="00B050"/>
+                </a:solidFill>
+              </a:rPr>
+              <a:t>  • Validate on new data</a:t>
+            </a:r>
+          </a:p>
+          <a:p>
+            <a:pPr>
+              <a:spcAft>
+                <a:spcPts val="1000"/>
+              </a:spcAft>
+              <a:defRPr sz="1500">
+                <a:solidFill>
+                  <a:srgbClr val="333333"/>
+                </a:solidFill>
+              </a:defRPr>
+            </a:pPr>
+            <a:endParaRPr dirty="0"/>
+          </a:p>
+        </p:txBody>
+      </p:sp>
     </p:spTree>
   </p:cSld>
   <p:clrMapOvr>
